--- a/docs/liquidround_user_guide.pptx
+++ b/docs/liquidround_user_guide.pptx
@@ -17,6 +17,12 @@
     <p:sldId id="265" r:id="rId16"/>
     <p:sldId id="266" r:id="rId17"/>
     <p:sldId id="267" r:id="rId18"/>
+    <p:sldId id="268" r:id="rId19"/>
+    <p:sldId id="269" r:id="rId20"/>
+    <p:sldId id="270" r:id="rId21"/>
+    <p:sldId id="271" r:id="rId22"/>
+    <p:sldId id="272" r:id="rId23"/>
+    <p:sldId id="273" r:id="rId24"/>
   </p:sldIdLst>
   <p:sldSz cx="12191695" cy="6858000" type="screen4x3"/>
   <p:notesSz cx="6858000" cy="9144000"/>
@@ -3281,8 +3287,8 @@
         </p:nvSpPr>
         <p:spPr>
           <a:xfrm>
-            <a:off x="731520" y="365760"/>
-            <a:ext cx="10515600" cy="731520"/>
+            <a:off x="731520" y="274320"/>
+            <a:ext cx="10515600" cy="640080"/>
           </a:xfrm>
           <a:prstGeom prst="rect">
             <a:avLst/>
@@ -3296,28 +3302,52 @@
           <a:lstStyle/>
           <a:p>
             <a:pPr algn="l">
-              <a:defRPr sz="3200" b="1">
+              <a:defRPr sz="2800" b="1">
                 <a:solidFill>
                   <a:srgbClr val="F59E0B"/>
                 </a:solidFill>
               </a:defRPr>
             </a:pPr>
             <a:r>
-              <a:t>Configuration</a:t>
-            </a:r>
-          </a:p>
-        </p:txBody>
-      </p:sp>
-      <p:sp>
-        <p:nvSpPr>
-          <p:cNvPr id="3" name="TextBox 2"/>
+              <a:t>Free tools — no sign-in required</a:t>
+            </a:r>
+          </a:p>
+        </p:txBody>
+      </p:sp>
+      <p:pic>
+        <p:nvPicPr>
+          <p:cNvPr id="3" name="Picture 2" descr="07-tools-comps.png"/>
+          <p:cNvPicPr>
+            <a:picLocks noChangeAspect="1"/>
+          </p:cNvPicPr>
+          <p:nvPr/>
+        </p:nvPicPr>
+        <p:blipFill>
+          <a:blip r:embed="rId2"/>
+          <a:stretch>
+            <a:fillRect/>
+          </a:stretch>
+        </p:blipFill>
+        <p:spPr>
+          <a:xfrm>
+            <a:off x="6217920" y="1005840"/>
+            <a:ext cx="5486400" cy="3429000"/>
+          </a:xfrm>
+          <a:prstGeom prst="rect">
+            <a:avLst/>
+          </a:prstGeom>
+        </p:spPr>
+      </p:pic>
+      <p:sp>
+        <p:nvSpPr>
+          <p:cNvPr id="4" name="TextBox 3"/>
           <p:cNvSpPr txBox="1"/>
           <p:nvPr/>
         </p:nvSpPr>
         <p:spPr>
           <a:xfrm>
-            <a:off x="731520" y="1280160"/>
-            <a:ext cx="10515600" cy="5029200"/>
+            <a:off x="731520" y="1005840"/>
+            <a:ext cx="5303520" cy="5303520"/>
           </a:xfrm>
           <a:prstGeom prst="rect">
             <a:avLst/>
@@ -3332,67 +3362,205 @@
           <a:p>
             <a:pPr>
               <a:spcBef>
-                <a:spcPts val="1200"/>
+                <a:spcPts val="1000"/>
               </a:spcBef>
               <a:spcAft>
                 <a:spcPts val="400"/>
               </a:spcAft>
-              <a:defRPr sz="1800" b="1">
+              <a:defRPr sz="1600" b="1">
                 <a:solidFill>
                   <a:srgbClr val="F59E0B"/>
                 </a:solidFill>
               </a:defRPr>
             </a:pPr>
             <a:r>
-              <a:t>Currency</a:t>
-            </a:r>
-          </a:p>
-          <a:p>
-            <a:pPr>
+              <a:t>Market Comparables</a:t>
+            </a:r>
+          </a:p>
+          <a:p>
+            <a:pPr>
+              <a:spcAft>
+                <a:spcPts val="300"/>
+              </a:spcAft>
+              <a:defRPr sz="1300">
+                <a:solidFill>
+                  <a:srgbClr val="F8FAFC"/>
+                </a:solidFill>
+              </a:defRPr>
+            </a:pPr>
+            <a:r>
+              <a:t>Enter a company URL to get sector M&amp;A benchmarks — EV/Revenue and EV/EBITDA</a:t>
+            </a:r>
+          </a:p>
+          <a:p>
+            <a:pPr>
+              <a:spcAft>
+                <a:spcPts val="300"/>
+              </a:spcAft>
+              <a:defRPr sz="1300">
+                <a:solidFill>
+                  <a:srgbClr val="F8FAFC"/>
+                </a:solidFill>
+              </a:defRPr>
+            </a:pPr>
+            <a:r>
+              <a:t>multiples compared to Damodaran sector averages.</a:t>
+            </a:r>
+          </a:p>
+          <a:p>
+            <a:pPr>
+              <a:spcBef>
+                <a:spcPts val="1000"/>
+              </a:spcBef>
               <a:spcAft>
                 <a:spcPts val="400"/>
               </a:spcAft>
-              <a:defRPr sz="1400">
-                <a:solidFill>
-                  <a:srgbClr val="F8FAFC"/>
-                </a:solidFill>
-              </a:defRPr>
-            </a:pPr>
-            <a:r>
-              <a:t>Switch between EUR, GBP, and USD in the Configuration section of the left pane.</a:t>
+              <a:defRPr sz="1600" b="1">
+                <a:solidFill>
+                  <a:srgbClr val="F59E0B"/>
+                </a:solidFill>
+              </a:defRPr>
+            </a:pPr>
+            <a:r>
+              <a:t>Business Valuation</a:t>
+            </a:r>
+          </a:p>
+          <a:p>
+            <a:pPr>
+              <a:spcAft>
+                <a:spcPts val="300"/>
+              </a:spcAft>
+              <a:defRPr sz="1300">
+                <a:solidFill>
+                  <a:srgbClr val="F8FAFC"/>
+                </a:solidFill>
+              </a:defRPr>
+            </a:pPr>
+            <a:r>
+              <a:t>Enter a company URL and basic financials to get an indicative valuation range.</a:t>
+            </a:r>
+          </a:p>
+          <a:p>
+            <a:pPr>
+              <a:spcAft>
+                <a:spcPts val="300"/>
+              </a:spcAft>
+              <a:defRPr sz="1300">
+                <a:solidFill>
+                  <a:srgbClr val="F8FAFC"/>
+                </a:solidFill>
+              </a:defRPr>
+            </a:pPr>
+            <a:r>
+              <a:t>AI-generated value drivers (positive and negative) are included. Supports</a:t>
+            </a:r>
+          </a:p>
+          <a:p>
+            <a:pPr>
+              <a:spcAft>
+                <a:spcPts val="300"/>
+              </a:spcAft>
+              <a:defRPr sz="1300">
+                <a:solidFill>
+                  <a:srgbClr val="F8FAFC"/>
+                </a:solidFill>
+              </a:defRPr>
+            </a:pPr>
+            <a:r>
+              <a:t>human-friendly number input: 1M, 500k, 2.5B, or 1,000,000.</a:t>
             </a:r>
           </a:p>
           <a:p>
             <a:pPr>
               <a:spcBef>
-                <a:spcPts val="1200"/>
+                <a:spcPts val="1000"/>
               </a:spcBef>
               <a:spcAft>
                 <a:spcPts val="400"/>
               </a:spcAft>
-              <a:defRPr sz="1800" b="1">
+              <a:defRPr sz="1600" b="1">
                 <a:solidFill>
                   <a:srgbClr val="F59E0B"/>
                 </a:solidFill>
               </a:defRPr>
             </a:pPr>
             <a:r>
-              <a:t>Role</a:t>
-            </a:r>
-          </a:p>
-          <a:p>
-            <a:pPr>
-              <a:spcAft>
-                <a:spcPts val="400"/>
-              </a:spcAft>
-              <a:defRPr sz="1400">
-                <a:solidFill>
-                  <a:srgbClr val="F8FAFC"/>
-                </a:solidFill>
-              </a:defRPr>
-            </a:pPr>
-            <a:r>
-              <a:t>Set your default view to Buyer, Seller, or Both. This affects which agents and suggestions appear first.</a:t>
+              <a:t>Find Buyers</a:t>
+            </a:r>
+          </a:p>
+          <a:p>
+            <a:pPr>
+              <a:spcAft>
+                <a:spcPts val="300"/>
+              </a:spcAft>
+              <a:defRPr sz="1300">
+                <a:solidFill>
+                  <a:srgbClr val="F8FAFC"/>
+                </a:solidFill>
+              </a:defRPr>
+            </a:pPr>
+            <a:r>
+              <a:t>Enter a company URL to identify potential strategic and financial buyers with</a:t>
+            </a:r>
+          </a:p>
+          <a:p>
+            <a:pPr>
+              <a:spcAft>
+                <a:spcPts val="300"/>
+              </a:spcAft>
+              <a:defRPr sz="1300">
+                <a:solidFill>
+                  <a:srgbClr val="F8FAFC"/>
+                </a:solidFill>
+              </a:defRPr>
+            </a:pPr>
+            <a:r>
+              <a:t>match scoring.</a:t>
+            </a:r>
+          </a:p>
+          <a:p>
+            <a:pPr>
+              <a:spcAft>
+                <a:spcPts val="300"/>
+              </a:spcAft>
+              <a:defRPr sz="1300">
+                <a:solidFill>
+                  <a:srgbClr val="F8FAFC"/>
+                </a:solidFill>
+              </a:defRPr>
+            </a:pPr>
+            <a:r>
+              <a:t>All three tools work by scraping the company website, identifying the sector, and</a:t>
+            </a:r>
+          </a:p>
+          <a:p>
+            <a:pPr>
+              <a:spcAft>
+                <a:spcPts val="300"/>
+              </a:spcAft>
+              <a:defRPr sz="1300">
+                <a:solidFill>
+                  <a:srgbClr val="F8FAFC"/>
+                </a:solidFill>
+              </a:defRPr>
+            </a:pPr>
+            <a:r>
+              <a:t>applying relevant multiples and buyer databases. Each ends with a **Book a</a:t>
+            </a:r>
+          </a:p>
+          <a:p>
+            <a:pPr>
+              <a:spcAft>
+                <a:spcPts val="300"/>
+              </a:spcAft>
+              <a:defRPr sz="1300">
+                <a:solidFill>
+                  <a:srgbClr val="F8FAFC"/>
+                </a:solidFill>
+              </a:defRPr>
+            </a:pPr>
+            <a:r>
+              <a:t>15-minute call** lead capture form.</a:t>
             </a:r>
           </a:p>
         </p:txBody>
@@ -3431,8 +3599,8 @@
         </p:nvSpPr>
         <p:spPr>
           <a:xfrm>
-            <a:off x="731520" y="365760"/>
-            <a:ext cx="10515600" cy="731520"/>
+            <a:off x="731520" y="274320"/>
+            <a:ext cx="10515600" cy="640080"/>
           </a:xfrm>
           <a:prstGeom prst="rect">
             <a:avLst/>
@@ -3446,28 +3614,52 @@
           <a:lstStyle/>
           <a:p>
             <a:pPr algn="l">
-              <a:defRPr sz="3200" b="1">
+              <a:defRPr sz="2800" b="1">
                 <a:solidFill>
                   <a:srgbClr val="F59E0B"/>
                 </a:solidFill>
               </a:defRPr>
             </a:pPr>
             <a:r>
-              <a:t>Keyboard Shortcuts</a:t>
-            </a:r>
-          </a:p>
-        </p:txBody>
-      </p:sp>
-      <p:sp>
-        <p:nvSpPr>
-          <p:cNvPr id="3" name="TextBox 2"/>
+              <a:t>Industries</a:t>
+            </a:r>
+          </a:p>
+        </p:txBody>
+      </p:sp>
+      <p:pic>
+        <p:nvPicPr>
+          <p:cNvPr id="3" name="Picture 2" descr="09-industries.png"/>
+          <p:cNvPicPr>
+            <a:picLocks noChangeAspect="1"/>
+          </p:cNvPicPr>
+          <p:nvPr/>
+        </p:nvPicPr>
+        <p:blipFill>
+          <a:blip r:embed="rId2"/>
+          <a:stretch>
+            <a:fillRect/>
+          </a:stretch>
+        </p:blipFill>
+        <p:spPr>
+          <a:xfrm>
+            <a:off x="6217920" y="1005840"/>
+            <a:ext cx="5486400" cy="3429000"/>
+          </a:xfrm>
+          <a:prstGeom prst="rect">
+            <a:avLst/>
+          </a:prstGeom>
+        </p:spPr>
+      </p:pic>
+      <p:sp>
+        <p:nvSpPr>
+          <p:cNvPr id="4" name="TextBox 3"/>
           <p:cNvSpPr txBox="1"/>
           <p:nvPr/>
         </p:nvSpPr>
         <p:spPr>
           <a:xfrm>
-            <a:off x="731520" y="1280160"/>
-            <a:ext cx="10515600" cy="5029200"/>
+            <a:off x="731520" y="1005840"/>
+            <a:ext cx="5303520" cy="5303520"/>
           </a:xfrm>
           <a:prstGeom prst="rect">
             <a:avLst/>
@@ -3480,33 +3672,48 @@
           </a:bodyPr>
           <a:lstStyle/>
           <a:p>
-            <a:pPr lvl="1">
-              <a:spcAft>
-                <a:spcPts val="400"/>
-              </a:spcAft>
-              <a:defRPr sz="1400">
-                <a:solidFill>
-                  <a:srgbClr val="F8FAFC"/>
-                </a:solidFill>
-              </a:defRPr>
-            </a:pPr>
-            <a:r>
-              <a:t>• Enter — Send message</a:t>
-            </a:r>
-          </a:p>
-          <a:p>
-            <a:pPr lvl="1">
-              <a:spcAft>
-                <a:spcPts val="400"/>
-              </a:spcAft>
-              <a:defRPr sz="1400">
-                <a:solidFill>
-                  <a:srgbClr val="F8FAFC"/>
-                </a:solidFill>
-              </a:defRPr>
-            </a:pPr>
-            <a:r>
-              <a:t>• Shift+Enter — New line in message</a:t>
+            <a:pPr>
+              <a:spcAft>
+                <a:spcPts val="300"/>
+              </a:spcAft>
+              <a:defRPr sz="1300">
+                <a:solidFill>
+                  <a:srgbClr val="F8FAFC"/>
+                </a:solidFill>
+              </a:defRPr>
+            </a:pPr>
+            <a:r>
+              <a:t>Sector-specific M&amp;A advisory pages across the Baltics and Nordics. Each industry</a:t>
+            </a:r>
+          </a:p>
+          <a:p>
+            <a:pPr>
+              <a:spcAft>
+                <a:spcPts val="300"/>
+              </a:spcAft>
+              <a:defRPr sz="1300">
+                <a:solidFill>
+                  <a:srgbClr val="F8FAFC"/>
+                </a:solidFill>
+              </a:defRPr>
+            </a:pPr>
+            <a:r>
+              <a:t>page includes sector description, sub-sectors, advisor CTAs, and a "Find Buyers"</a:t>
+            </a:r>
+          </a:p>
+          <a:p>
+            <a:pPr>
+              <a:spcAft>
+                <a:spcPts val="300"/>
+              </a:spcAft>
+              <a:defRPr sz="1300">
+                <a:solidFill>
+                  <a:srgbClr val="F8FAFC"/>
+                </a:solidFill>
+              </a:defRPr>
+            </a:pPr>
+            <a:r>
+              <a:t>widget.</a:t>
             </a:r>
           </a:p>
         </p:txBody>
@@ -3545,8 +3752,8 @@
         </p:nvSpPr>
         <p:spPr>
           <a:xfrm>
-            <a:off x="731520" y="365760"/>
-            <a:ext cx="10515600" cy="731520"/>
+            <a:off x="731520" y="274320"/>
+            <a:ext cx="10515600" cy="640080"/>
           </a:xfrm>
           <a:prstGeom prst="rect">
             <a:avLst/>
@@ -3560,28 +3767,52 @@
           <a:lstStyle/>
           <a:p>
             <a:pPr algn="l">
-              <a:defRPr sz="3200" b="1">
+              <a:defRPr sz="2800" b="1">
                 <a:solidFill>
                   <a:srgbClr val="F59E0B"/>
                 </a:solidFill>
               </a:defRPr>
             </a:pPr>
             <a:r>
-              <a:t>Tips</a:t>
-            </a:r>
-          </a:p>
-        </p:txBody>
-      </p:sp>
-      <p:sp>
-        <p:nvSpPr>
-          <p:cNvPr id="3" name="TextBox 2"/>
+              <a:t>Public Markets</a:t>
+            </a:r>
+          </a:p>
+        </p:txBody>
+      </p:sp>
+      <p:pic>
+        <p:nvPicPr>
+          <p:cNvPr id="3" name="Picture 2" descr="16-ipo-map.png"/>
+          <p:cNvPicPr>
+            <a:picLocks noChangeAspect="1"/>
+          </p:cNvPicPr>
+          <p:nvPr/>
+        </p:nvPicPr>
+        <p:blipFill>
+          <a:blip r:embed="rId2"/>
+          <a:stretch>
+            <a:fillRect/>
+          </a:stretch>
+        </p:blipFill>
+        <p:spPr>
+          <a:xfrm>
+            <a:off x="6217920" y="1005840"/>
+            <a:ext cx="5486400" cy="3429000"/>
+          </a:xfrm>
+          <a:prstGeom prst="rect">
+            <a:avLst/>
+          </a:prstGeom>
+        </p:spPr>
+      </p:pic>
+      <p:sp>
+        <p:nvSpPr>
+          <p:cNvPr id="4" name="TextBox 3"/>
           <p:cNvSpPr txBox="1"/>
           <p:nvPr/>
         </p:nvSpPr>
         <p:spPr>
           <a:xfrm>
-            <a:off x="731520" y="1280160"/>
-            <a:ext cx="10515600" cy="5029200"/>
+            <a:off x="731520" y="1005840"/>
+            <a:ext cx="5303520" cy="5303520"/>
           </a:xfrm>
           <a:prstGeom prst="rect">
             <a:avLst/>
@@ -3594,6 +3825,819 @@
           </a:bodyPr>
           <a:lstStyle/>
           <a:p>
+            <a:pPr>
+              <a:spcBef>
+                <a:spcPts val="1000"/>
+              </a:spcBef>
+              <a:spcAft>
+                <a:spcPts val="400"/>
+              </a:spcAft>
+              <a:defRPr sz="1600" b="1">
+                <a:solidFill>
+                  <a:srgbClr val="F59E0B"/>
+                </a:solidFill>
+              </a:defRPr>
+            </a:pPr>
+            <a:r>
+              <a:t>IPO Map</a:t>
+            </a:r>
+          </a:p>
+          <a:p>
+            <a:pPr>
+              <a:spcAft>
+                <a:spcPts val="300"/>
+              </a:spcAft>
+              <a:defRPr sz="1300">
+                <a:solidFill>
+                  <a:srgbClr val="F8FAFC"/>
+                </a:solidFill>
+              </a:defRPr>
+            </a:pPr>
+            <a:r>
+              <a:t>Global IPO heatmap — recent IPOs sized by market cap, colored by performance since</a:t>
+            </a:r>
+          </a:p>
+          <a:p>
+            <a:pPr>
+              <a:spcAft>
+                <a:spcPts val="300"/>
+              </a:spcAft>
+              <a:defRPr sz="1300">
+                <a:solidFill>
+                  <a:srgbClr val="F8FAFC"/>
+                </a:solidFill>
+              </a:defRPr>
+            </a:pPr>
+            <a:r>
+              <a:t>listing. Filter by region, country, exchange, and sector. KPIs: total IPOs, average</a:t>
+            </a:r>
+          </a:p>
+          <a:p>
+            <a:pPr>
+              <a:spcAft>
+                <a:spcPts val="300"/>
+              </a:spcAft>
+              <a:defRPr sz="1300">
+                <a:solidFill>
+                  <a:srgbClr val="F8FAFC"/>
+                </a:solidFill>
+              </a:defRPr>
+            </a:pPr>
+            <a:r>
+              <a:t>performance, total market cap, best performer.</a:t>
+            </a:r>
+          </a:p>
+          <a:p>
+            <a:pPr>
+              <a:spcBef>
+                <a:spcPts val="1000"/>
+              </a:spcBef>
+              <a:spcAft>
+                <a:spcPts val="400"/>
+              </a:spcAft>
+              <a:defRPr sz="1600" b="1">
+                <a:solidFill>
+                  <a:srgbClr val="F59E0B"/>
+                </a:solidFill>
+              </a:defRPr>
+            </a:pPr>
+            <a:r>
+              <a:t>IPO Pipeline</a:t>
+            </a:r>
+          </a:p>
+          <a:p>
+            <a:pPr>
+              <a:spcAft>
+                <a:spcPts val="300"/>
+              </a:spcAft>
+              <a:defRPr sz="1300">
+                <a:solidFill>
+                  <a:srgbClr val="F8FAFC"/>
+                </a:solidFill>
+              </a:defRPr>
+            </a:pPr>
+            <a:r>
+              <a:t>Track private mega-caps and upcoming US IPOs from the NASDAQ calendar. Bar chart</a:t>
+            </a:r>
+          </a:p>
+          <a:p>
+            <a:pPr>
+              <a:spcAft>
+                <a:spcPts val="300"/>
+              </a:spcAft>
+              <a:defRPr sz="1300">
+                <a:solidFill>
+                  <a:srgbClr val="F8FAFC"/>
+                </a:solidFill>
+              </a:defRPr>
+            </a:pPr>
+            <a:r>
+              <a:t>by sector, with company details including round, valuation, and description.</a:t>
+            </a:r>
+          </a:p>
+          <a:p>
+            <a:pPr>
+              <a:spcBef>
+                <a:spcPts val="1000"/>
+              </a:spcBef>
+              <a:spcAft>
+                <a:spcPts val="400"/>
+              </a:spcAft>
+              <a:defRPr sz="1600" b="1">
+                <a:solidFill>
+                  <a:srgbClr val="F59E0B"/>
+                </a:solidFill>
+              </a:defRPr>
+            </a:pPr>
+            <a:r>
+              <a:t>Prospectus</a:t>
+            </a:r>
+          </a:p>
+          <a:p>
+            <a:pPr>
+              <a:spcAft>
+                <a:spcPts val="300"/>
+              </a:spcAft>
+              <a:defRPr sz="1300">
+                <a:solidFill>
+                  <a:srgbClr val="F8FAFC"/>
+                </a:solidFill>
+              </a:defRPr>
+            </a:pPr>
+            <a:r>
+              <a:t>Browse and analyze IPO prospectus documents.</a:t>
+            </a:r>
+          </a:p>
+        </p:txBody>
+      </p:sp>
+    </p:spTree>
+  </p:cSld>
+  <p:clrMapOvr>
+    <a:masterClrMapping/>
+  </p:clrMapOvr>
+</p:sld>
+</file>
+
+<file path=ppt/slides/slide13.xml><?xml version="1.0" encoding="utf-8"?>
+<p:sld xmlns:a="http://schemas.openxmlformats.org/drawingml/2006/main" xmlns:p="http://schemas.openxmlformats.org/presentationml/2006/main" xmlns:r="http://schemas.openxmlformats.org/officeDocument/2006/relationships">
+  <p:cSld>
+    <p:bg>
+      <p:bgPr>
+        <a:solidFill>
+          <a:srgbClr val="0B1220"/>
+        </a:solidFill>
+        <a:effectLst/>
+      </p:bgPr>
+    </p:bg>
+    <p:spTree>
+      <p:nvGrpSpPr>
+        <p:cNvPr id="1" name=""/>
+        <p:cNvGrpSpPr/>
+        <p:nvPr/>
+      </p:nvGrpSpPr>
+      <p:grpSpPr/>
+      <p:sp>
+        <p:nvSpPr>
+          <p:cNvPr id="2" name="TextBox 1"/>
+          <p:cNvSpPr txBox="1"/>
+          <p:nvPr/>
+        </p:nvSpPr>
+        <p:spPr>
+          <a:xfrm>
+            <a:off x="731520" y="274320"/>
+            <a:ext cx="10515600" cy="640080"/>
+          </a:xfrm>
+          <a:prstGeom prst="rect">
+            <a:avLst/>
+          </a:prstGeom>
+          <a:noFill/>
+        </p:spPr>
+        <p:txBody>
+          <a:bodyPr wrap="square">
+            <a:spAutoFit/>
+          </a:bodyPr>
+          <a:lstStyle/>
+          <a:p>
+            <a:pPr algn="l">
+              <a:defRPr sz="2800" b="1">
+                <a:solidFill>
+                  <a:srgbClr val="F59E0B"/>
+                </a:solidFill>
+              </a:defRPr>
+            </a:pPr>
+            <a:r>
+              <a:t>Workspace pages</a:t>
+            </a:r>
+          </a:p>
+        </p:txBody>
+      </p:sp>
+      <p:pic>
+        <p:nvPicPr>
+          <p:cNvPr id="3" name="Picture 2" descr="10-companies.png"/>
+          <p:cNvPicPr>
+            <a:picLocks noChangeAspect="1"/>
+          </p:cNvPicPr>
+          <p:nvPr/>
+        </p:nvPicPr>
+        <p:blipFill>
+          <a:blip r:embed="rId2"/>
+          <a:stretch>
+            <a:fillRect/>
+          </a:stretch>
+        </p:blipFill>
+        <p:spPr>
+          <a:xfrm>
+            <a:off x="6217920" y="1005840"/>
+            <a:ext cx="5486400" cy="3429000"/>
+          </a:xfrm>
+          <a:prstGeom prst="rect">
+            <a:avLst/>
+          </a:prstGeom>
+        </p:spPr>
+      </p:pic>
+      <p:sp>
+        <p:nvSpPr>
+          <p:cNvPr id="4" name="TextBox 3"/>
+          <p:cNvSpPr txBox="1"/>
+          <p:nvPr/>
+        </p:nvSpPr>
+        <p:spPr>
+          <a:xfrm>
+            <a:off x="731520" y="1005840"/>
+            <a:ext cx="5303520" cy="5303520"/>
+          </a:xfrm>
+          <a:prstGeom prst="rect">
+            <a:avLst/>
+          </a:prstGeom>
+          <a:noFill/>
+        </p:spPr>
+        <p:txBody>
+          <a:bodyPr wrap="square">
+            <a:spAutoFit/>
+          </a:bodyPr>
+          <a:lstStyle/>
+          <a:p>
+            <a:pPr>
+              <a:spcBef>
+                <a:spcPts val="1000"/>
+              </a:spcBef>
+              <a:spcAft>
+                <a:spcPts val="400"/>
+              </a:spcAft>
+              <a:defRPr sz="1600" b="1">
+                <a:solidFill>
+                  <a:srgbClr val="F59E0B"/>
+                </a:solidFill>
+              </a:defRPr>
+            </a:pPr>
+            <a:r>
+              <a:t>Companies</a:t>
+            </a:r>
+          </a:p>
+          <a:p>
+            <a:pPr>
+              <a:spcAft>
+                <a:spcPts val="300"/>
+              </a:spcAft>
+              <a:defRPr sz="1300">
+                <a:solidFill>
+                  <a:srgbClr val="F8FAFC"/>
+                </a:solidFill>
+              </a:defRPr>
+            </a:pPr>
+            <a:r>
+              <a:t>Search the company database by name, sector, or geography. Click a company to see</a:t>
+            </a:r>
+          </a:p>
+          <a:p>
+            <a:pPr>
+              <a:spcAft>
+                <a:spcPts val="300"/>
+              </a:spcAft>
+              <a:defRPr sz="1300">
+                <a:solidFill>
+                  <a:srgbClr val="F8FAFC"/>
+                </a:solidFill>
+              </a:defRPr>
+            </a:pPr>
+            <a:r>
+              <a:t>its full profile with financials, description, and deal brief.</a:t>
+            </a:r>
+          </a:p>
+          <a:p>
+            <a:pPr>
+              <a:spcBef>
+                <a:spcPts val="1000"/>
+              </a:spcBef>
+              <a:spcAft>
+                <a:spcPts val="400"/>
+              </a:spcAft>
+              <a:defRPr sz="1600" b="1">
+                <a:solidFill>
+                  <a:srgbClr val="F59E0B"/>
+                </a:solidFill>
+              </a:defRPr>
+            </a:pPr>
+            <a:r>
+              <a:t>Pipelines</a:t>
+            </a:r>
+          </a:p>
+          <a:p>
+            <a:pPr>
+              <a:spcAft>
+                <a:spcPts val="300"/>
+              </a:spcAft>
+              <a:defRPr sz="1300">
+                <a:solidFill>
+                  <a:srgbClr val="F8FAFC"/>
+                </a:solidFill>
+              </a:defRPr>
+            </a:pPr>
+            <a:r>
+              <a:t>Track your deal pipeline — add targets or buyers, set deal stages, and monitor</a:t>
+            </a:r>
+          </a:p>
+          <a:p>
+            <a:pPr>
+              <a:spcAft>
+                <a:spcPts val="300"/>
+              </a:spcAft>
+              <a:defRPr sz="1300">
+                <a:solidFill>
+                  <a:srgbClr val="F8FAFC"/>
+                </a:solidFill>
+              </a:defRPr>
+            </a:pPr>
+            <a:r>
+              <a:t>progress. Requires sign-in.</a:t>
+            </a:r>
+          </a:p>
+          <a:p>
+            <a:pPr>
+              <a:spcBef>
+                <a:spcPts val="1000"/>
+              </a:spcBef>
+              <a:spcAft>
+                <a:spcPts val="400"/>
+              </a:spcAft>
+              <a:defRPr sz="1600" b="1">
+                <a:solidFill>
+                  <a:srgbClr val="F59E0B"/>
+                </a:solidFill>
+              </a:defRPr>
+            </a:pPr>
+            <a:r>
+              <a:t>Daily Deals</a:t>
+            </a:r>
+          </a:p>
+          <a:p>
+            <a:pPr>
+              <a:spcAft>
+                <a:spcPts val="300"/>
+              </a:spcAft>
+              <a:defRPr sz="1300">
+                <a:solidFill>
+                  <a:srgbClr val="F8FAFC"/>
+                </a:solidFill>
+              </a:defRPr>
+            </a:pPr>
+            <a:r>
+              <a:t>AI-curated daily digest of M&amp;A-relevant companies. Each company gets a deal angle,</a:t>
+            </a:r>
+          </a:p>
+          <a:p>
+            <a:pPr>
+              <a:spcAft>
+                <a:spcPts val="300"/>
+              </a:spcAft>
+              <a:defRPr sz="1300">
+                <a:solidFill>
+                  <a:srgbClr val="F8FAFC"/>
+                </a:solidFill>
+              </a:defRPr>
+            </a:pPr>
+            <a:r>
+              <a:t>investment thesis, and sector comps. The featured company gets a deep dive with</a:t>
+            </a:r>
+          </a:p>
+          <a:p>
+            <a:pPr>
+              <a:spcAft>
+                <a:spcPts val="300"/>
+              </a:spcAft>
+              <a:defRPr sz="1300">
+                <a:solidFill>
+                  <a:srgbClr val="F8FAFC"/>
+                </a:solidFill>
+              </a:defRPr>
+            </a:pPr>
+            <a:r>
+              <a:t>company overview, deal context, and a bottom-line recommendation.</a:t>
+            </a:r>
+          </a:p>
+          <a:p>
+            <a:pPr>
+              <a:spcAft>
+                <a:spcPts val="300"/>
+              </a:spcAft>
+              <a:defRPr sz="1300">
+                <a:solidFill>
+                  <a:srgbClr val="F8FAFC"/>
+                </a:solidFill>
+              </a:defRPr>
+            </a:pPr>
+            <a:r>
+              <a:t>Delivered as a styled email — opt in via your profile preferences.</a:t>
+            </a:r>
+          </a:p>
+          <a:p>
+            <a:pPr>
+              <a:spcBef>
+                <a:spcPts val="1000"/>
+              </a:spcBef>
+              <a:spcAft>
+                <a:spcPts val="400"/>
+              </a:spcAft>
+              <a:defRPr sz="1600" b="1">
+                <a:solidFill>
+                  <a:srgbClr val="F59E0B"/>
+                </a:solidFill>
+              </a:defRPr>
+            </a:pPr>
+            <a:r>
+              <a:t>Valuation Simulator</a:t>
+            </a:r>
+          </a:p>
+          <a:p>
+            <a:pPr>
+              <a:spcAft>
+                <a:spcPts val="300"/>
+              </a:spcAft>
+              <a:defRPr sz="1300">
+                <a:solidFill>
+                  <a:srgbClr val="F8FAFC"/>
+                </a:solidFill>
+              </a:defRPr>
+            </a:pPr>
+            <a:r>
+              <a:t>Interactive valuation simulator with 4 methods: EV/Revenue multiples, EV/EBITDA</a:t>
+            </a:r>
+          </a:p>
+          <a:p>
+            <a:pPr>
+              <a:spcAft>
+                <a:spcPts val="300"/>
+              </a:spcAft>
+              <a:defRPr sz="1300">
+                <a:solidFill>
+                  <a:srgbClr val="F8FAFC"/>
+                </a:solidFill>
+              </a:defRPr>
+            </a:pPr>
+            <a:r>
+              <a:t>multiples, DCF (WACC + equity bridge), and combined view. Enter your financials</a:t>
+            </a:r>
+          </a:p>
+          <a:p>
+            <a:pPr>
+              <a:spcAft>
+                <a:spcPts val="300"/>
+              </a:spcAft>
+              <a:defRPr sz="1300">
+                <a:solidFill>
+                  <a:srgbClr val="F8FAFC"/>
+                </a:solidFill>
+              </a:defRPr>
+            </a:pPr>
+            <a:r>
+              <a:t>and adjust assumptions in real time.</a:t>
+            </a:r>
+          </a:p>
+          <a:p>
+            <a:pPr>
+              <a:spcBef>
+                <a:spcPts val="1000"/>
+              </a:spcBef>
+              <a:spcAft>
+                <a:spcPts val="400"/>
+              </a:spcAft>
+              <a:defRPr sz="1600" b="1">
+                <a:solidFill>
+                  <a:srgbClr val="F59E0B"/>
+                </a:solidFill>
+              </a:defRPr>
+            </a:pPr>
+            <a:r>
+              <a:t>Analytics</a:t>
+            </a:r>
+          </a:p>
+          <a:p>
+            <a:pPr>
+              <a:spcAft>
+                <a:spcPts val="300"/>
+              </a:spcAft>
+              <a:defRPr sz="1300">
+                <a:solidFill>
+                  <a:srgbClr val="F8FAFC"/>
+                </a:solidFill>
+              </a:defRPr>
+            </a:pPr>
+            <a:r>
+              <a:t>Text-to-SQL analytics — ask questions in plain English and get charts + tables</a:t>
+            </a:r>
+          </a:p>
+          <a:p>
+            <a:pPr>
+              <a:spcAft>
+                <a:spcPts val="300"/>
+              </a:spcAft>
+              <a:defRPr sz="1300">
+                <a:solidFill>
+                  <a:srgbClr val="F8FAFC"/>
+                </a:solidFill>
+              </a:defRPr>
+            </a:pPr>
+            <a:r>
+              <a:t>from the database.</a:t>
+            </a:r>
+          </a:p>
+          <a:p>
+            <a:pPr>
+              <a:spcBef>
+                <a:spcPts val="1000"/>
+              </a:spcBef>
+              <a:spcAft>
+                <a:spcPts val="400"/>
+              </a:spcAft>
+              <a:defRPr sz="1600" b="1">
+                <a:solidFill>
+                  <a:srgbClr val="F59E0B"/>
+                </a:solidFill>
+              </a:defRPr>
+            </a:pPr>
+            <a:r>
+              <a:t>Data Room</a:t>
+            </a:r>
+          </a:p>
+          <a:p>
+            <a:pPr>
+              <a:spcAft>
+                <a:spcPts val="300"/>
+              </a:spcAft>
+              <a:defRPr sz="1300">
+                <a:solidFill>
+                  <a:srgbClr val="F8FAFC"/>
+                </a:solidFill>
+              </a:defRPr>
+            </a:pPr>
+            <a:r>
+              <a:t>Upload and manage deal documents organized by company. Supports PDF, DOCX, XLSX,</a:t>
+            </a:r>
+          </a:p>
+          <a:p>
+            <a:pPr>
+              <a:spcAft>
+                <a:spcPts val="300"/>
+              </a:spcAft>
+              <a:defRPr sz="1300">
+                <a:solidFill>
+                  <a:srgbClr val="F8FAFC"/>
+                </a:solidFill>
+              </a:defRPr>
+            </a:pPr>
+            <a:r>
+              <a:t>PPTX, CSV, and image files. Drag-and-drop or use the upload button.</a:t>
+            </a:r>
+          </a:p>
+          <a:p>
+            <a:pPr>
+              <a:spcBef>
+                <a:spcPts val="1000"/>
+              </a:spcBef>
+              <a:spcAft>
+                <a:spcPts val="400"/>
+              </a:spcAft>
+              <a:defRPr sz="1600" b="1">
+                <a:solidFill>
+                  <a:srgbClr val="F59E0B"/>
+                </a:solidFill>
+              </a:defRPr>
+            </a:pPr>
+            <a:r>
+              <a:t>Documents</a:t>
+            </a:r>
+          </a:p>
+          <a:p>
+            <a:pPr>
+              <a:spcAft>
+                <a:spcPts val="300"/>
+              </a:spcAft>
+              <a:defRPr sz="1300">
+                <a:solidFill>
+                  <a:srgbClr val="F8FAFC"/>
+                </a:solidFill>
+              </a:defRPr>
+            </a:pPr>
+            <a:r>
+              <a:t>Browse uploaded documents. Extract key terms or score documents against buyer</a:t>
+            </a:r>
+          </a:p>
+          <a:p>
+            <a:pPr>
+              <a:spcAft>
+                <a:spcPts val="300"/>
+              </a:spcAft>
+              <a:defRPr sz="1300">
+                <a:solidFill>
+                  <a:srgbClr val="F8FAFC"/>
+                </a:solidFill>
+              </a:defRPr>
+            </a:pPr>
+            <a:r>
+              <a:t>criteria.</a:t>
+            </a:r>
+          </a:p>
+          <a:p>
+            <a:pPr>
+              <a:spcBef>
+                <a:spcPts val="1000"/>
+              </a:spcBef>
+              <a:spcAft>
+                <a:spcPts val="400"/>
+              </a:spcAft>
+              <a:defRPr sz="1600" b="1">
+                <a:solidFill>
+                  <a:srgbClr val="F59E0B"/>
+                </a:solidFill>
+              </a:defRPr>
+            </a:pPr>
+            <a:r>
+              <a:t>Deal History</a:t>
+            </a:r>
+          </a:p>
+          <a:p>
+            <a:pPr>
+              <a:spcAft>
+                <a:spcPts val="300"/>
+              </a:spcAft>
+              <a:defRPr sz="1300">
+                <a:solidFill>
+                  <a:srgbClr val="F8FAFC"/>
+                </a:solidFill>
+              </a:defRPr>
+            </a:pPr>
+            <a:r>
+              <a:t>View your workflow history with charts showing deal types, timeline, and status</a:t>
+            </a:r>
+          </a:p>
+          <a:p>
+            <a:pPr>
+              <a:spcAft>
+                <a:spcPts val="300"/>
+              </a:spcAft>
+              <a:defRPr sz="1300">
+                <a:solidFill>
+                  <a:srgbClr val="F8FAFC"/>
+                </a:solidFill>
+              </a:defRPr>
+            </a:pPr>
+            <a:r>
+              <a:t>distribution.</a:t>
+            </a:r>
+          </a:p>
+          <a:p>
+            <a:pPr>
+              <a:spcBef>
+                <a:spcPts val="1000"/>
+              </a:spcBef>
+              <a:spcAft>
+                <a:spcPts val="400"/>
+              </a:spcAft>
+              <a:defRPr sz="1600" b="1">
+                <a:solidFill>
+                  <a:srgbClr val="F59E0B"/>
+                </a:solidFill>
+              </a:defRPr>
+            </a:pPr>
+            <a:r>
+              <a:t>Instructions</a:t>
+            </a:r>
+          </a:p>
+          <a:p>
+            <a:pPr>
+              <a:spcAft>
+                <a:spcPts val="300"/>
+              </a:spcAft>
+              <a:defRPr sz="1300">
+                <a:solidFill>
+                  <a:srgbClr val="F8FAFC"/>
+                </a:solidFill>
+              </a:defRPr>
+            </a:pPr>
+            <a:r>
+              <a:t>View and customize agent system prompts to tailor AI behavior to your firm's</a:t>
+            </a:r>
+          </a:p>
+          <a:p>
+            <a:pPr>
+              <a:spcAft>
+                <a:spcPts val="300"/>
+              </a:spcAft>
+              <a:defRPr sz="1300">
+                <a:solidFill>
+                  <a:srgbClr val="F8FAFC"/>
+                </a:solidFill>
+              </a:defRPr>
+            </a:pPr>
+            <a:r>
+              <a:t>standards.</a:t>
+            </a:r>
+          </a:p>
+        </p:txBody>
+      </p:sp>
+    </p:spTree>
+  </p:cSld>
+  <p:clrMapOvr>
+    <a:masterClrMapping/>
+  </p:clrMapOvr>
+</p:sld>
+</file>
+
+<file path=ppt/slides/slide14.xml><?xml version="1.0" encoding="utf-8"?>
+<p:sld xmlns:a="http://schemas.openxmlformats.org/drawingml/2006/main" xmlns:p="http://schemas.openxmlformats.org/presentationml/2006/main" xmlns:r="http://schemas.openxmlformats.org/officeDocument/2006/relationships">
+  <p:cSld>
+    <p:bg>
+      <p:bgPr>
+        <a:solidFill>
+          <a:srgbClr val="0B1220"/>
+        </a:solidFill>
+        <a:effectLst/>
+      </p:bgPr>
+    </p:bg>
+    <p:spTree>
+      <p:nvGrpSpPr>
+        <p:cNvPr id="1" name=""/>
+        <p:cNvGrpSpPr/>
+        <p:nvPr/>
+      </p:nvGrpSpPr>
+      <p:grpSpPr/>
+      <p:sp>
+        <p:nvSpPr>
+          <p:cNvPr id="2" name="TextBox 1"/>
+          <p:cNvSpPr txBox="1"/>
+          <p:nvPr/>
+        </p:nvSpPr>
+        <p:spPr>
+          <a:xfrm>
+            <a:off x="731520" y="274320"/>
+            <a:ext cx="10515600" cy="640080"/>
+          </a:xfrm>
+          <a:prstGeom prst="rect">
+            <a:avLst/>
+          </a:prstGeom>
+          <a:noFill/>
+        </p:spPr>
+        <p:txBody>
+          <a:bodyPr wrap="square">
+            <a:spAutoFit/>
+          </a:bodyPr>
+          <a:lstStyle/>
+          <a:p>
+            <a:pPr algn="l">
+              <a:defRPr sz="2800" b="1">
+                <a:solidFill>
+                  <a:srgbClr val="F59E0B"/>
+                </a:solidFill>
+              </a:defRPr>
+            </a:pPr>
+            <a:r>
+              <a:t>Exports</a:t>
+            </a:r>
+          </a:p>
+        </p:txBody>
+      </p:sp>
+      <p:sp>
+        <p:nvSpPr>
+          <p:cNvPr id="3" name="TextBox 2"/>
+          <p:cNvSpPr txBox="1"/>
+          <p:nvPr/>
+        </p:nvSpPr>
+        <p:spPr>
+          <a:xfrm>
+            <a:off x="731520" y="1005840"/>
+            <a:ext cx="10515600" cy="5303520"/>
+          </a:xfrm>
+          <a:prstGeom prst="rect">
+            <a:avLst/>
+          </a:prstGeom>
+          <a:noFill/>
+        </p:spPr>
+        <p:txBody>
+          <a:bodyPr wrap="square">
+            <a:spAutoFit/>
+          </a:bodyPr>
+          <a:lstStyle/>
+          <a:p>
             <a:pPr lvl="1">
               <a:spcAft>
                 <a:spcPts val="400"/>
@@ -3605,7 +4649,7 @@
               </a:defRPr>
             </a:pPr>
             <a:r>
-              <a:t>• Use the Copy button to copy all chat messages to clipboard</a:t>
+              <a:t>• Excel (XLSX) — when an agent produces a table, click Download XLSX for a formatted spreadsheet with styled headers.</a:t>
             </a:r>
           </a:p>
           <a:p>
@@ -3620,7 +4664,7 @@
               </a:defRPr>
             </a:pPr>
             <a:r>
-              <a:t>• Use the Share button to generate a shareable link for your chat session</a:t>
+              <a:t>• Word (DOCX) — IC memos, teasers, and other markdown content export as Word documents via Download DOCX.</a:t>
             </a:r>
           </a:p>
           <a:p>
@@ -3635,9 +4679,93 @@
               </a:defRPr>
             </a:pPr>
             <a:r>
-              <a:t>• The News tab in the right pane shows live M&amp;A news from major financial sources</a:t>
-            </a:r>
-          </a:p>
+              <a:t>• PDF — IC memos produce a PDF preview in the right pane. Company cards can also be downloaded as branded PDFs.</a:t>
+            </a:r>
+          </a:p>
+        </p:txBody>
+      </p:sp>
+    </p:spTree>
+  </p:cSld>
+  <p:clrMapOvr>
+    <a:masterClrMapping/>
+  </p:clrMapOvr>
+</p:sld>
+</file>
+
+<file path=ppt/slides/slide15.xml><?xml version="1.0" encoding="utf-8"?>
+<p:sld xmlns:a="http://schemas.openxmlformats.org/drawingml/2006/main" xmlns:p="http://schemas.openxmlformats.org/presentationml/2006/main" xmlns:r="http://schemas.openxmlformats.org/officeDocument/2006/relationships">
+  <p:cSld>
+    <p:bg>
+      <p:bgPr>
+        <a:solidFill>
+          <a:srgbClr val="0B1220"/>
+        </a:solidFill>
+        <a:effectLst/>
+      </p:bgPr>
+    </p:bg>
+    <p:spTree>
+      <p:nvGrpSpPr>
+        <p:cNvPr id="1" name=""/>
+        <p:cNvGrpSpPr/>
+        <p:nvPr/>
+      </p:nvGrpSpPr>
+      <p:grpSpPr/>
+      <p:sp>
+        <p:nvSpPr>
+          <p:cNvPr id="2" name="TextBox 1"/>
+          <p:cNvSpPr txBox="1"/>
+          <p:nvPr/>
+        </p:nvSpPr>
+        <p:spPr>
+          <a:xfrm>
+            <a:off x="731520" y="274320"/>
+            <a:ext cx="10515600" cy="640080"/>
+          </a:xfrm>
+          <a:prstGeom prst="rect">
+            <a:avLst/>
+          </a:prstGeom>
+          <a:noFill/>
+        </p:spPr>
+        <p:txBody>
+          <a:bodyPr wrap="square">
+            <a:spAutoFit/>
+          </a:bodyPr>
+          <a:lstStyle/>
+          <a:p>
+            <a:pPr algn="l">
+              <a:defRPr sz="2800" b="1">
+                <a:solidFill>
+                  <a:srgbClr val="F59E0B"/>
+                </a:solidFill>
+              </a:defRPr>
+            </a:pPr>
+            <a:r>
+              <a:t>Configuration</a:t>
+            </a:r>
+          </a:p>
+        </p:txBody>
+      </p:sp>
+      <p:sp>
+        <p:nvSpPr>
+          <p:cNvPr id="3" name="TextBox 2"/>
+          <p:cNvSpPr txBox="1"/>
+          <p:nvPr/>
+        </p:nvSpPr>
+        <p:spPr>
+          <a:xfrm>
+            <a:off x="731520" y="1005840"/>
+            <a:ext cx="10515600" cy="5303520"/>
+          </a:xfrm>
+          <a:prstGeom prst="rect">
+            <a:avLst/>
+          </a:prstGeom>
+          <a:noFill/>
+        </p:spPr>
+        <p:txBody>
+          <a:bodyPr wrap="square">
+            <a:spAutoFit/>
+          </a:bodyPr>
+          <a:lstStyle/>
           <a:p>
             <a:pPr lvl="1">
               <a:spcAft>
@@ -3650,7 +4778,7 @@
               </a:defRPr>
             </a:pPr>
             <a:r>
-              <a:t>• The Artifact tab shows agent-produced tables, charts, and citations</a:t>
+              <a:t>• Currency — switch between EUR, GBP, and USD in Configuration.</a:t>
             </a:r>
           </a:p>
           <a:p>
@@ -3665,7 +4793,7 @@
               </a:defRPr>
             </a:pPr>
             <a:r>
-              <a:t>• Upload documents via the paperclip button or drag-and-drop</a:t>
+              <a:t>• Role — set your default view to Buyer, Seller, or Both. Affects which agents and suggestions appear first.</a:t>
             </a:r>
           </a:p>
           <a:p>
@@ -3680,7 +4808,499 @@
               </a:defRPr>
             </a:pPr>
             <a:r>
-              <a:t>• All collapsible nav sections (Agents, Tools, Public Markets, Hedge Funds, Workspace) can be expanded by clicking the section header</a:t>
+              <a:t>• Number input — all financial inputs support human-friendly shortcuts: 1M, 35.5k, 2B, 1,000,000.</a:t>
+            </a:r>
+          </a:p>
+        </p:txBody>
+      </p:sp>
+    </p:spTree>
+  </p:cSld>
+  <p:clrMapOvr>
+    <a:masterClrMapping/>
+  </p:clrMapOvr>
+</p:sld>
+</file>
+
+<file path=ppt/slides/slide16.xml><?xml version="1.0" encoding="utf-8"?>
+<p:sld xmlns:a="http://schemas.openxmlformats.org/drawingml/2006/main" xmlns:p="http://schemas.openxmlformats.org/presentationml/2006/main" xmlns:r="http://schemas.openxmlformats.org/officeDocument/2006/relationships">
+  <p:cSld>
+    <p:bg>
+      <p:bgPr>
+        <a:solidFill>
+          <a:srgbClr val="0B1220"/>
+        </a:solidFill>
+        <a:effectLst/>
+      </p:bgPr>
+    </p:bg>
+    <p:spTree>
+      <p:nvGrpSpPr>
+        <p:cNvPr id="1" name=""/>
+        <p:cNvGrpSpPr/>
+        <p:nvPr/>
+      </p:nvGrpSpPr>
+      <p:grpSpPr/>
+      <p:sp>
+        <p:nvSpPr>
+          <p:cNvPr id="2" name="TextBox 1"/>
+          <p:cNvSpPr txBox="1"/>
+          <p:nvPr/>
+        </p:nvSpPr>
+        <p:spPr>
+          <a:xfrm>
+            <a:off x="731520" y="274320"/>
+            <a:ext cx="10515600" cy="640080"/>
+          </a:xfrm>
+          <a:prstGeom prst="rect">
+            <a:avLst/>
+          </a:prstGeom>
+          <a:noFill/>
+        </p:spPr>
+        <p:txBody>
+          <a:bodyPr wrap="square">
+            <a:spAutoFit/>
+          </a:bodyPr>
+          <a:lstStyle/>
+          <a:p>
+            <a:pPr algn="l">
+              <a:defRPr sz="2800" b="1">
+                <a:solidFill>
+                  <a:srgbClr val="F59E0B"/>
+                </a:solidFill>
+              </a:defRPr>
+            </a:pPr>
+            <a:r>
+              <a:t>Keyboard shortcuts</a:t>
+            </a:r>
+          </a:p>
+        </p:txBody>
+      </p:sp>
+      <p:sp>
+        <p:nvSpPr>
+          <p:cNvPr id="3" name="TextBox 2"/>
+          <p:cNvSpPr txBox="1"/>
+          <p:nvPr/>
+        </p:nvSpPr>
+        <p:spPr>
+          <a:xfrm>
+            <a:off x="731520" y="1005840"/>
+            <a:ext cx="10515600" cy="5303520"/>
+          </a:xfrm>
+          <a:prstGeom prst="rect">
+            <a:avLst/>
+          </a:prstGeom>
+          <a:noFill/>
+        </p:spPr>
+        <p:txBody>
+          <a:bodyPr wrap="square">
+            <a:spAutoFit/>
+          </a:bodyPr>
+          <a:lstStyle/>
+          <a:p>
+            <a:pPr lvl="1">
+              <a:spcAft>
+                <a:spcPts val="400"/>
+              </a:spcAft>
+              <a:defRPr sz="1400">
+                <a:solidFill>
+                  <a:srgbClr val="F8FAFC"/>
+                </a:solidFill>
+              </a:defRPr>
+            </a:pPr>
+            <a:r>
+              <a:t>• Enter — send message</a:t>
+            </a:r>
+          </a:p>
+          <a:p>
+            <a:pPr lvl="1">
+              <a:spcAft>
+                <a:spcPts val="400"/>
+              </a:spcAft>
+              <a:defRPr sz="1400">
+                <a:solidFill>
+                  <a:srgbClr val="F8FAFC"/>
+                </a:solidFill>
+              </a:defRPr>
+            </a:pPr>
+            <a:r>
+              <a:t>• Shift+Enter — new line in message</a:t>
+            </a:r>
+          </a:p>
+        </p:txBody>
+      </p:sp>
+    </p:spTree>
+  </p:cSld>
+  <p:clrMapOvr>
+    <a:masterClrMapping/>
+  </p:clrMapOvr>
+</p:sld>
+</file>
+
+<file path=ppt/slides/slide17.xml><?xml version="1.0" encoding="utf-8"?>
+<p:sld xmlns:a="http://schemas.openxmlformats.org/drawingml/2006/main" xmlns:p="http://schemas.openxmlformats.org/presentationml/2006/main" xmlns:r="http://schemas.openxmlformats.org/officeDocument/2006/relationships">
+  <p:cSld>
+    <p:bg>
+      <p:bgPr>
+        <a:solidFill>
+          <a:srgbClr val="0B1220"/>
+        </a:solidFill>
+        <a:effectLst/>
+      </p:bgPr>
+    </p:bg>
+    <p:spTree>
+      <p:nvGrpSpPr>
+        <p:cNvPr id="1" name=""/>
+        <p:cNvGrpSpPr/>
+        <p:nvPr/>
+      </p:nvGrpSpPr>
+      <p:grpSpPr/>
+      <p:sp>
+        <p:nvSpPr>
+          <p:cNvPr id="2" name="TextBox 1"/>
+          <p:cNvSpPr txBox="1"/>
+          <p:nvPr/>
+        </p:nvSpPr>
+        <p:spPr>
+          <a:xfrm>
+            <a:off x="731520" y="274320"/>
+            <a:ext cx="10515600" cy="640080"/>
+          </a:xfrm>
+          <a:prstGeom prst="rect">
+            <a:avLst/>
+          </a:prstGeom>
+          <a:noFill/>
+        </p:spPr>
+        <p:txBody>
+          <a:bodyPr wrap="square">
+            <a:spAutoFit/>
+          </a:bodyPr>
+          <a:lstStyle/>
+          <a:p>
+            <a:pPr algn="l">
+              <a:defRPr sz="2800" b="1">
+                <a:solidFill>
+                  <a:srgbClr val="F59E0B"/>
+                </a:solidFill>
+              </a:defRPr>
+            </a:pPr>
+            <a:r>
+              <a:t>Tips</a:t>
+            </a:r>
+          </a:p>
+        </p:txBody>
+      </p:sp>
+      <p:sp>
+        <p:nvSpPr>
+          <p:cNvPr id="3" name="TextBox 2"/>
+          <p:cNvSpPr txBox="1"/>
+          <p:nvPr/>
+        </p:nvSpPr>
+        <p:spPr>
+          <a:xfrm>
+            <a:off x="731520" y="1005840"/>
+            <a:ext cx="10515600" cy="5303520"/>
+          </a:xfrm>
+          <a:prstGeom prst="rect">
+            <a:avLst/>
+          </a:prstGeom>
+          <a:noFill/>
+        </p:spPr>
+        <p:txBody>
+          <a:bodyPr wrap="square">
+            <a:spAutoFit/>
+          </a:bodyPr>
+          <a:lstStyle/>
+          <a:p>
+            <a:pPr lvl="1">
+              <a:spcAft>
+                <a:spcPts val="400"/>
+              </a:spcAft>
+              <a:defRPr sz="1400">
+                <a:solidFill>
+                  <a:srgbClr val="F8FAFC"/>
+                </a:solidFill>
+              </a:defRPr>
+            </a:pPr>
+            <a:r>
+              <a:t>• Use the Copy button to copy all chat messages to clipboard.</a:t>
+            </a:r>
+          </a:p>
+          <a:p>
+            <a:pPr lvl="1">
+              <a:spcAft>
+                <a:spcPts val="400"/>
+              </a:spcAft>
+              <a:defRPr sz="1400">
+                <a:solidFill>
+                  <a:srgbClr val="F8FAFC"/>
+                </a:solidFill>
+              </a:defRPr>
+            </a:pPr>
+            <a:r>
+              <a:t>• Use the Share button to generate a shareable link for your session.</a:t>
+            </a:r>
+          </a:p>
+          <a:p>
+            <a:pPr lvl="1">
+              <a:spcAft>
+                <a:spcPts val="400"/>
+              </a:spcAft>
+              <a:defRPr sz="1400">
+                <a:solidFill>
+                  <a:srgbClr val="F8FAFC"/>
+                </a:solidFill>
+              </a:defRPr>
+            </a:pPr>
+            <a:r>
+              <a:t>• The News tab in the right pane shows live M&amp;A news.</a:t>
+            </a:r>
+          </a:p>
+          <a:p>
+            <a:pPr lvl="1">
+              <a:spcAft>
+                <a:spcPts val="400"/>
+              </a:spcAft>
+              <a:defRPr sz="1400">
+                <a:solidFill>
+                  <a:srgbClr val="F8FAFC"/>
+                </a:solidFill>
+              </a:defRPr>
+            </a:pPr>
+            <a:r>
+              <a:t>• The Artifact tab shows agent-produced tables, charts, and citations.</a:t>
+            </a:r>
+          </a:p>
+          <a:p>
+            <a:pPr lvl="1">
+              <a:spcAft>
+                <a:spcPts val="400"/>
+              </a:spcAft>
+              <a:defRPr sz="1400">
+                <a:solidFill>
+                  <a:srgbClr val="F8FAFC"/>
+                </a:solidFill>
+              </a:defRPr>
+            </a:pPr>
+            <a:r>
+              <a:t>• Upload documents via the paperclip button or drag-and-drop.</a:t>
+            </a:r>
+          </a:p>
+          <a:p>
+            <a:pPr lvl="1">
+              <a:spcAft>
+                <a:spcPts val="400"/>
+              </a:spcAft>
+              <a:defRPr sz="1400">
+                <a:solidFill>
+                  <a:srgbClr val="F8FAFC"/>
+                </a:solidFill>
+              </a:defRPr>
+            </a:pPr>
+            <a:r>
+              <a:t>• All collapsible nav sections can be expanded by clicking the section header.</a:t>
+            </a:r>
+          </a:p>
+        </p:txBody>
+      </p:sp>
+    </p:spTree>
+  </p:cSld>
+  <p:clrMapOvr>
+    <a:masterClrMapping/>
+  </p:clrMapOvr>
+</p:sld>
+</file>
+
+<file path=ppt/slides/slide18.xml><?xml version="1.0" encoding="utf-8"?>
+<p:sld xmlns:a="http://schemas.openxmlformats.org/drawingml/2006/main" xmlns:p="http://schemas.openxmlformats.org/presentationml/2006/main" xmlns:r="http://schemas.openxmlformats.org/officeDocument/2006/relationships">
+  <p:cSld>
+    <p:bg>
+      <p:bgPr>
+        <a:solidFill>
+          <a:srgbClr val="0B1220"/>
+        </a:solidFill>
+        <a:effectLst/>
+      </p:bgPr>
+    </p:bg>
+    <p:spTree>
+      <p:nvGrpSpPr>
+        <p:cNvPr id="1" name=""/>
+        <p:cNvGrpSpPr/>
+        <p:nvPr/>
+      </p:nvGrpSpPr>
+      <p:grpSpPr/>
+      <p:sp>
+        <p:nvSpPr>
+          <p:cNvPr id="2" name="TextBox 1"/>
+          <p:cNvSpPr txBox="1"/>
+          <p:nvPr/>
+        </p:nvSpPr>
+        <p:spPr>
+          <a:xfrm>
+            <a:off x="731520" y="274320"/>
+            <a:ext cx="10515600" cy="640080"/>
+          </a:xfrm>
+          <a:prstGeom prst="rect">
+            <a:avLst/>
+          </a:prstGeom>
+          <a:noFill/>
+        </p:spPr>
+        <p:txBody>
+          <a:bodyPr wrap="square">
+            <a:spAutoFit/>
+          </a:bodyPr>
+          <a:lstStyle/>
+          <a:p>
+            <a:pPr algn="l">
+              <a:defRPr sz="2800" b="1">
+                <a:solidFill>
+                  <a:srgbClr val="F59E0B"/>
+                </a:solidFill>
+              </a:defRPr>
+            </a:pPr>
+            <a:r>
+              <a:t>Quick reference</a:t>
+            </a:r>
+          </a:p>
+        </p:txBody>
+      </p:sp>
+      <p:sp>
+        <p:nvSpPr>
+          <p:cNvPr id="3" name="TextBox 2"/>
+          <p:cNvSpPr txBox="1"/>
+          <p:nvPr/>
+        </p:nvSpPr>
+        <p:spPr>
+          <a:xfrm>
+            <a:off x="731520" y="1005840"/>
+            <a:ext cx="10515600" cy="5303520"/>
+          </a:xfrm>
+          <a:prstGeom prst="rect">
+            <a:avLst/>
+          </a:prstGeom>
+          <a:noFill/>
+        </p:spPr>
+        <p:txBody>
+          <a:bodyPr wrap="square">
+            <a:spAutoFit/>
+          </a:bodyPr>
+          <a:lstStyle/>
+          <a:p>
+            <a:pPr>
+              <a:spcAft>
+                <a:spcPts val="400"/>
+              </a:spcAft>
+              <a:defRPr sz="1400">
+                <a:solidFill>
+                  <a:srgbClr val="F8FAFC"/>
+                </a:solidFill>
+              </a:defRPr>
+            </a:pPr>
+            <a:r>
+              <a:t>Navigation</a:t>
+            </a:r>
+          </a:p>
+          <a:p>
+            <a:pPr lvl="1">
+              <a:spcAft>
+                <a:spcPts val="400"/>
+              </a:spcAft>
+              <a:defRPr sz="1400">
+                <a:solidFill>
+                  <a:srgbClr val="F8FAFC"/>
+                </a:solidFill>
+              </a:defRPr>
+            </a:pPr>
+            <a:r>
+              <a:t>• *Agents* — 6 categories, 23 specialists · *Tools* — Market Comps, Find Buyers, Valuation</a:t>
+            </a:r>
+          </a:p>
+          <a:p>
+            <a:pPr lvl="1">
+              <a:spcAft>
+                <a:spcPts val="400"/>
+              </a:spcAft>
+              <a:defRPr sz="1400">
+                <a:solidFill>
+                  <a:srgbClr val="F8FAFC"/>
+                </a:solidFill>
+              </a:defRPr>
+            </a:pPr>
+            <a:r>
+              <a:t>• *Public Markets* — IPO Map, IPO Pipeline, Prospectus</a:t>
+            </a:r>
+          </a:p>
+          <a:p>
+            <a:pPr lvl="1">
+              <a:spcAft>
+                <a:spcPts val="400"/>
+              </a:spcAft>
+              <a:defRPr sz="1400">
+                <a:solidFill>
+                  <a:srgbClr val="F8FAFC"/>
+                </a:solidFill>
+              </a:defRPr>
+            </a:pPr>
+            <a:r>
+              <a:t>• *Hedge Funds* — Fund Treemap, Top Holdings, Popular Securities, Activist Filings</a:t>
+            </a:r>
+          </a:p>
+          <a:p>
+            <a:pPr lvl="1">
+              <a:spcAft>
+                <a:spcPts val="400"/>
+              </a:spcAft>
+              <a:defRPr sz="1400">
+                <a:solidFill>
+                  <a:srgbClr val="F8FAFC"/>
+                </a:solidFill>
+              </a:defRPr>
+            </a:pPr>
+            <a:r>
+              <a:t>• *Workspace* — Companies, Pipelines, Daily Deals, Valuation, Analytics, Data Room, Documents, Deal History, Exports, Instructions</a:t>
+            </a:r>
+          </a:p>
+          <a:p>
+            <a:pPr lvl="1">
+              <a:spcAft>
+                <a:spcPts val="400"/>
+              </a:spcAft>
+              <a:defRPr sz="1400">
+                <a:solidFill>
+                  <a:srgbClr val="F8FAFC"/>
+                </a:solidFill>
+              </a:defRPr>
+            </a:pPr>
+            <a:r>
+              <a:t>• *Help* — Profile, Help page, Keyboard shortcuts</a:t>
+            </a:r>
+          </a:p>
+          <a:p>
+            <a:pPr>
+              <a:spcAft>
+                <a:spcPts val="400"/>
+              </a:spcAft>
+              <a:defRPr sz="1400">
+                <a:solidFill>
+                  <a:srgbClr val="F8FAFC"/>
+                </a:solidFill>
+              </a:defRPr>
+            </a:pPr>
+            <a:r>
+              <a:t>Prefix commands: profile: · scan: · buyers: · triage: · intent: · dcf: · multi: · comps: · ltm: · synergy: · score · vdr: · abstract: · legal: · ops: · esg: · memo: · teaser: · bid: · ipo: · integrate: · research: · hedgefunds:</a:t>
+            </a:r>
+          </a:p>
+          <a:p>
+            <a:pPr>
+              <a:spcAft>
+                <a:spcPts val="400"/>
+              </a:spcAft>
+              <a:defRPr sz="1400">
+                <a:solidFill>
+                  <a:srgbClr val="F8FAFC"/>
+                </a:solidFill>
+              </a:defRPr>
+            </a:pPr>
+            <a:r>
+              <a:t>LiquidRound v0.4.0 — Predictive Labs Ltd</a:t>
             </a:r>
           </a:p>
         </p:txBody>
@@ -3719,8 +5339,8 @@
         </p:nvSpPr>
         <p:spPr>
           <a:xfrm>
-            <a:off x="731520" y="365760"/>
-            <a:ext cx="10515600" cy="731520"/>
+            <a:off x="731520" y="274320"/>
+            <a:ext cx="10515600" cy="640080"/>
           </a:xfrm>
           <a:prstGeom prst="rect">
             <a:avLst/>
@@ -3734,14 +5354,14 @@
           <a:lstStyle/>
           <a:p>
             <a:pPr algn="l">
-              <a:defRPr sz="3200" b="1">
+              <a:defRPr sz="2800" b="1">
                 <a:solidFill>
                   <a:srgbClr val="F59E0B"/>
                 </a:solidFill>
               </a:defRPr>
             </a:pPr>
             <a:r>
-              <a:t>Getting Started</a:t>
+              <a:t>User Guide — AI ECM / IB Analyst Squad for M&amp;A and IPO</a:t>
             </a:r>
           </a:p>
         </p:txBody>
@@ -3754,8 +5374,8 @@
         </p:nvSpPr>
         <p:spPr>
           <a:xfrm>
-            <a:off x="731520" y="1280160"/>
-            <a:ext cx="10515600" cy="5029200"/>
+            <a:off x="731520" y="1005840"/>
+            <a:ext cx="10515600" cy="5303520"/>
           </a:xfrm>
           <a:prstGeom prst="rect">
             <a:avLst/>
@@ -3779,11 +5399,11 @@
               </a:defRPr>
             </a:pPr>
             <a:r>
-              <a:t>LiquidRound provides three modes of operation:</a:t>
-            </a:r>
-          </a:p>
-          <a:p>
-            <a:pPr lvl="1">
+              <a:t>Version 0.4.0 · Predictive Labs Ltd · Live at liquidround.ai</a:t>
+            </a:r>
+          </a:p>
+          <a:p>
+            <a:pPr>
               <a:spcAft>
                 <a:spcPts val="400"/>
               </a:spcAft>
@@ -3794,11 +5414,11 @@
               </a:defRPr>
             </a:pPr>
             <a:r>
-              <a:t>• Buyer-Led — Find acquisition targets, run diligence, score matches, and draft IC memos</a:t>
-            </a:r>
-          </a:p>
-          <a:p>
-            <a:pPr lvl="1">
+              <a:t>An AI-powered M&amp;A, IPO readiness, and hedge fund intelligence platform.</a:t>
+            </a:r>
+          </a:p>
+          <a:p>
+            <a:pPr>
               <a:spcAft>
                 <a:spcPts val="400"/>
               </a:spcAft>
@@ -3809,11 +5429,11 @@
               </a:defRPr>
             </a:pPr>
             <a:r>
-              <a:t>• Seller-Led — Prepare for sale (teasers / CIMs), identify buyers, and assess IPO readiness</a:t>
-            </a:r>
-          </a:p>
-          <a:p>
-            <a:pPr lvl="1">
+              <a:t>23 specialist agents — buyer-led sourcing and diligence, seller-led positioning</a:t>
+            </a:r>
+          </a:p>
+          <a:p>
+            <a:pPr>
               <a:spcAft>
                 <a:spcPts val="400"/>
               </a:spcAft>
@@ -3824,22 +5444,7 @@
               </a:defRPr>
             </a:pPr>
             <a:r>
-              <a:t>• Public Markets / Hedge Funds — Explore SEC 13F institutional holdings, fund AUM rankings, and activist filings</a:t>
-            </a:r>
-          </a:p>
-          <a:p>
-            <a:pPr>
-              <a:spcAft>
-                <a:spcPts val="400"/>
-              </a:spcAft>
-              <a:defRPr sz="1400">
-                <a:solidFill>
-                  <a:srgbClr val="F8FAFC"/>
-                </a:solidFill>
-              </a:defRPr>
-            </a:pPr>
-            <a:r>
-              <a:t>Sign in or register to save your sessions, conversations, and pipelines. Guest users can still use the chat with in-memory sessions.</a:t>
+              <a:t>and IPO readiness, and public markets intelligence — in one chat-first workspace.</a:t>
             </a:r>
           </a:p>
         </p:txBody>
@@ -3878,8 +5483,8 @@
         </p:nvSpPr>
         <p:spPr>
           <a:xfrm>
-            <a:off x="731520" y="365760"/>
-            <a:ext cx="10515600" cy="731520"/>
+            <a:off x="731520" y="274320"/>
+            <a:ext cx="10515600" cy="640080"/>
           </a:xfrm>
           <a:prstGeom prst="rect">
             <a:avLst/>
@@ -3893,1749 +5498,161 @@
           <a:lstStyle/>
           <a:p>
             <a:pPr algn="l">
-              <a:defRPr sz="3200" b="1">
+              <a:defRPr sz="2800" b="1">
                 <a:solidFill>
                   <a:srgbClr val="F59E0B"/>
                 </a:solidFill>
               </a:defRPr>
             </a:pPr>
             <a:r>
-              <a:t>The Chat Interface</a:t>
-            </a:r>
-          </a:p>
-        </p:txBody>
-      </p:sp>
-      <p:graphicFrame>
-        <p:nvGraphicFramePr>
-          <p:cNvPr id="3" name="Table 2"/>
-          <p:cNvGraphicFramePr>
-            <a:graphicFrameLocks noGrp="1"/>
-          </p:cNvGraphicFramePr>
+              <a:t>What this platform is for</a:t>
+            </a:r>
+          </a:p>
+        </p:txBody>
+      </p:sp>
+      <p:sp>
+        <p:nvSpPr>
+          <p:cNvPr id="3" name="TextBox 2"/>
+          <p:cNvSpPr txBox="1"/>
           <p:nvPr/>
-        </p:nvGraphicFramePr>
-        <p:xfrm>
-          <a:off x="731520" y="1280160"/>
-          <a:ext cx="10515600" cy="5029200"/>
-        </p:xfrm>
-        <a:graphic>
-          <a:graphicData uri="http://schemas.openxmlformats.org/drawingml/2006/table">
-            <a:tbl>
-              <a:tblPr firstRow="1" bandRow="1">
-                <a:tableStyleId>{5C22544A-7EE6-4342-B048-85BDC9FD1C3A}</a:tableStyleId>
-              </a:tblPr>
-              <a:tblGrid>
-                <a:gridCol w="3505200"/>
-                <a:gridCol w="3505200"/>
-                <a:gridCol w="3505200"/>
-              </a:tblGrid>
-              <a:tr h="209550">
-                <a:tc>
-                  <a:txBody>
-                    <a:bodyPr/>
-                    <a:lstStyle/>
-                    <a:p>
-                      <a:pPr>
-                        <a:defRPr sz="1100" b="1">
-                          <a:solidFill>
-                            <a:srgbClr val="0B1220"/>
-                          </a:solidFill>
-                        </a:defRPr>
-                      </a:pPr>
-                      <a:r>
-                        <a:t>Prefix</a:t>
-                      </a:r>
-                    </a:p>
-                  </a:txBody>
-                  <a:tcPr>
-                    <a:solidFill>
-                      <a:srgbClr val="F59E0B"/>
-                    </a:solidFill>
-                  </a:tcPr>
-                </a:tc>
-                <a:tc>
-                  <a:txBody>
-                    <a:bodyPr/>
-                    <a:lstStyle/>
-                    <a:p>
-                      <a:pPr>
-                        <a:defRPr sz="1100" b="1">
-                          <a:solidFill>
-                            <a:srgbClr val="0B1220"/>
-                          </a:solidFill>
-                        </a:defRPr>
-                      </a:pPr>
-                      <a:r>
-                        <a:t>Agent</a:t>
-                      </a:r>
-                    </a:p>
-                  </a:txBody>
-                  <a:tcPr>
-                    <a:solidFill>
-                      <a:srgbClr val="F59E0B"/>
-                    </a:solidFill>
-                  </a:tcPr>
-                </a:tc>
-                <a:tc>
-                  <a:txBody>
-                    <a:bodyPr/>
-                    <a:lstStyle/>
-                    <a:p>
-                      <a:pPr>
-                        <a:defRPr sz="1100" b="1">
-                          <a:solidFill>
-                            <a:srgbClr val="0B1220"/>
-                          </a:solidFill>
-                        </a:defRPr>
-                      </a:pPr>
-                      <a:r>
-                        <a:t>What it does</a:t>
-                      </a:r>
-                    </a:p>
-                  </a:txBody>
-                  <a:tcPr>
-                    <a:solidFill>
-                      <a:srgbClr val="F59E0B"/>
-                    </a:solidFill>
-                  </a:tcPr>
-                </a:tc>
-              </a:tr>
-              <a:tr h="209550">
-                <a:tc>
-                  <a:txBody>
-                    <a:bodyPr/>
-                    <a:lstStyle/>
-                    <a:p>
-                      <a:pPr>
-                        <a:defRPr sz="1000" b="0">
-                          <a:solidFill>
-                            <a:srgbClr val="F8FAFC"/>
-                          </a:solidFill>
-                        </a:defRPr>
-                      </a:pPr>
-                      <a:r>
-                        <a:t>profile:</a:t>
-                      </a:r>
-                    </a:p>
-                  </a:txBody>
-                  <a:tcPr>
-                    <a:solidFill>
-                      <a:srgbClr val="111827"/>
-                    </a:solidFill>
-                  </a:tcPr>
-                </a:tc>
-                <a:tc>
-                  <a:txBody>
-                    <a:bodyPr/>
-                    <a:lstStyle/>
-                    <a:p>
-                      <a:pPr>
-                        <a:defRPr sz="1000" b="0">
-                          <a:solidFill>
-                            <a:srgbClr val="F8FAFC"/>
-                          </a:solidFill>
-                        </a:defRPr>
-                      </a:pPr>
-                      <a:r>
-                        <a:t>Company Profiler</a:t>
-                      </a:r>
-                    </a:p>
-                  </a:txBody>
-                  <a:tcPr>
-                    <a:solidFill>
-                      <a:srgbClr val="111827"/>
-                    </a:solidFill>
-                  </a:tcPr>
-                </a:tc>
-                <a:tc>
-                  <a:txBody>
-                    <a:bodyPr/>
-                    <a:lstStyle/>
-                    <a:p>
-                      <a:pPr>
-                        <a:defRPr sz="1000" b="0">
-                          <a:solidFill>
-                            <a:srgbClr val="F8FAFC"/>
-                          </a:solidFill>
-                        </a:defRPr>
-                      </a:pPr>
-                      <a:r>
-                        <a:t>Look up a company by ticker</a:t>
-                      </a:r>
-                    </a:p>
-                  </a:txBody>
-                  <a:tcPr>
-                    <a:solidFill>
-                      <a:srgbClr val="111827"/>
-                    </a:solidFill>
-                  </a:tcPr>
-                </a:tc>
-              </a:tr>
-              <a:tr h="209550">
-                <a:tc>
-                  <a:txBody>
-                    <a:bodyPr/>
-                    <a:lstStyle/>
-                    <a:p>
-                      <a:pPr>
-                        <a:defRPr sz="1000" b="0">
-                          <a:solidFill>
-                            <a:srgbClr val="F8FAFC"/>
-                          </a:solidFill>
-                        </a:defRPr>
-                      </a:pPr>
-                      <a:r>
-                        <a:t>scan:</a:t>
-                      </a:r>
-                    </a:p>
-                  </a:txBody>
-                  <a:tcPr>
-                    <a:solidFill>
-                      <a:srgbClr val="111827"/>
-                    </a:solidFill>
-                  </a:tcPr>
-                </a:tc>
-                <a:tc>
-                  <a:txBody>
-                    <a:bodyPr/>
-                    <a:lstStyle/>
-                    <a:p>
-                      <a:pPr>
-                        <a:defRPr sz="1000" b="0">
-                          <a:solidFill>
-                            <a:srgbClr val="F8FAFC"/>
-                          </a:solidFill>
-                        </a:defRPr>
-                      </a:pPr>
-                      <a:r>
-                        <a:t>Target Scanner</a:t>
-                      </a:r>
-                    </a:p>
-                  </a:txBody>
-                  <a:tcPr>
-                    <a:solidFill>
-                      <a:srgbClr val="111827"/>
-                    </a:solidFill>
-                  </a:tcPr>
-                </a:tc>
-                <a:tc>
-                  <a:txBody>
-                    <a:bodyPr/>
-                    <a:lstStyle/>
-                    <a:p>
-                      <a:pPr>
-                        <a:defRPr sz="1000" b="0">
-                          <a:solidFill>
-                            <a:srgbClr val="F8FAFC"/>
-                          </a:solidFill>
-                        </a:defRPr>
-                      </a:pPr>
-                      <a:r>
-                        <a:t>Find acquisition targets</a:t>
-                      </a:r>
-                    </a:p>
-                  </a:txBody>
-                  <a:tcPr>
-                    <a:solidFill>
-                      <a:srgbClr val="111827"/>
-                    </a:solidFill>
-                  </a:tcPr>
-                </a:tc>
-              </a:tr>
-              <a:tr h="209550">
-                <a:tc>
-                  <a:txBody>
-                    <a:bodyPr/>
-                    <a:lstStyle/>
-                    <a:p>
-                      <a:pPr>
-                        <a:defRPr sz="1000" b="0">
-                          <a:solidFill>
-                            <a:srgbClr val="F8FAFC"/>
-                          </a:solidFill>
-                        </a:defRPr>
-                      </a:pPr>
-                      <a:r>
-                        <a:t>buyers:</a:t>
-                      </a:r>
-                    </a:p>
-                  </a:txBody>
-                  <a:tcPr>
-                    <a:solidFill>
-                      <a:srgbClr val="111827"/>
-                    </a:solidFill>
-                  </a:tcPr>
-                </a:tc>
-                <a:tc>
-                  <a:txBody>
-                    <a:bodyPr/>
-                    <a:lstStyle/>
-                    <a:p>
-                      <a:pPr>
-                        <a:defRPr sz="1000" b="0">
-                          <a:solidFill>
-                            <a:srgbClr val="F8FAFC"/>
-                          </a:solidFill>
-                        </a:defRPr>
-                      </a:pPr>
-                      <a:r>
-                        <a:t>Buyer Scanner</a:t>
-                      </a:r>
-                    </a:p>
-                  </a:txBody>
-                  <a:tcPr>
-                    <a:solidFill>
-                      <a:srgbClr val="111827"/>
-                    </a:solidFill>
-                  </a:tcPr>
-                </a:tc>
-                <a:tc>
-                  <a:txBody>
-                    <a:bodyPr/>
-                    <a:lstStyle/>
-                    <a:p>
-                      <a:pPr>
-                        <a:defRPr sz="1000" b="0">
-                          <a:solidFill>
-                            <a:srgbClr val="F8FAFC"/>
-                          </a:solidFill>
-                        </a:defRPr>
-                      </a:pPr>
-                      <a:r>
-                        <a:t>Identify strategic/financial buyers</a:t>
-                      </a:r>
-                    </a:p>
-                  </a:txBody>
-                  <a:tcPr>
-                    <a:solidFill>
-                      <a:srgbClr val="111827"/>
-                    </a:solidFill>
-                  </a:tcPr>
-                </a:tc>
-              </a:tr>
-              <a:tr h="209550">
-                <a:tc>
-                  <a:txBody>
-                    <a:bodyPr/>
-                    <a:lstStyle/>
-                    <a:p>
-                      <a:pPr>
-                        <a:defRPr sz="1000" b="0">
-                          <a:solidFill>
-                            <a:srgbClr val="F8FAFC"/>
-                          </a:solidFill>
-                        </a:defRPr>
-                      </a:pPr>
-                      <a:r>
-                        <a:t>triage:</a:t>
-                      </a:r>
-                    </a:p>
-                  </a:txBody>
-                  <a:tcPr>
-                    <a:solidFill>
-                      <a:srgbClr val="111827"/>
-                    </a:solidFill>
-                  </a:tcPr>
-                </a:tc>
-                <a:tc>
-                  <a:txBody>
-                    <a:bodyPr/>
-                    <a:lstStyle/>
-                    <a:p>
-                      <a:pPr>
-                        <a:defRPr sz="1000" b="0">
-                          <a:solidFill>
-                            <a:srgbClr val="F8FAFC"/>
-                          </a:solidFill>
-                        </a:defRPr>
-                      </a:pPr>
-                      <a:r>
-                        <a:t>Deal Triage</a:t>
-                      </a:r>
-                    </a:p>
-                  </a:txBody>
-                  <a:tcPr>
-                    <a:solidFill>
-                      <a:srgbClr val="111827"/>
-                    </a:solidFill>
-                  </a:tcPr>
-                </a:tc>
-                <a:tc>
-                  <a:txBody>
-                    <a:bodyPr/>
-                    <a:lstStyle/>
-                    <a:p>
-                      <a:pPr>
-                        <a:defRPr sz="1000" b="0">
-                          <a:solidFill>
-                            <a:srgbClr val="F8FAFC"/>
-                          </a:solidFill>
-                        </a:defRPr>
-                      </a:pPr>
-                      <a:r>
-                        <a:t>Quick deal screening</a:t>
-                      </a:r>
-                    </a:p>
-                  </a:txBody>
-                  <a:tcPr>
-                    <a:solidFill>
-                      <a:srgbClr val="111827"/>
-                    </a:solidFill>
-                  </a:tcPr>
-                </a:tc>
-              </a:tr>
-              <a:tr h="209550">
-                <a:tc>
-                  <a:txBody>
-                    <a:bodyPr/>
-                    <a:lstStyle/>
-                    <a:p>
-                      <a:pPr>
-                        <a:defRPr sz="1000" b="0">
-                          <a:solidFill>
-                            <a:srgbClr val="F8FAFC"/>
-                          </a:solidFill>
-                        </a:defRPr>
-                      </a:pPr>
-                      <a:r>
-                        <a:t>intent:</a:t>
-                      </a:r>
-                    </a:p>
-                  </a:txBody>
-                  <a:tcPr>
-                    <a:solidFill>
-                      <a:srgbClr val="111827"/>
-                    </a:solidFill>
-                  </a:tcPr>
-                </a:tc>
-                <a:tc>
-                  <a:txBody>
-                    <a:bodyPr/>
-                    <a:lstStyle/>
-                    <a:p>
-                      <a:pPr>
-                        <a:defRPr sz="1000" b="0">
-                          <a:solidFill>
-                            <a:srgbClr val="F8FAFC"/>
-                          </a:solidFill>
-                        </a:defRPr>
-                      </a:pPr>
-                      <a:r>
-                        <a:t>Seller Intent</a:t>
-                      </a:r>
-                    </a:p>
-                  </a:txBody>
-                  <a:tcPr>
-                    <a:solidFill>
-                      <a:srgbClr val="111827"/>
-                    </a:solidFill>
-                  </a:tcPr>
-                </a:tc>
-                <a:tc>
-                  <a:txBody>
-                    <a:bodyPr/>
-                    <a:lstStyle/>
-                    <a:p>
-                      <a:pPr>
-                        <a:defRPr sz="1000" b="0">
-                          <a:solidFill>
-                            <a:srgbClr val="F8FAFC"/>
-                          </a:solidFill>
-                        </a:defRPr>
-                      </a:pPr>
-                      <a:r>
-                        <a:t>Analyze seller motivation</a:t>
-                      </a:r>
-                    </a:p>
-                  </a:txBody>
-                  <a:tcPr>
-                    <a:solidFill>
-                      <a:srgbClr val="111827"/>
-                    </a:solidFill>
-                  </a:tcPr>
-                </a:tc>
-              </a:tr>
-              <a:tr h="209550">
-                <a:tc>
-                  <a:txBody>
-                    <a:bodyPr/>
-                    <a:lstStyle/>
-                    <a:p>
-                      <a:pPr>
-                        <a:defRPr sz="1000" b="0">
-                          <a:solidFill>
-                            <a:srgbClr val="F8FAFC"/>
-                          </a:solidFill>
-                        </a:defRPr>
-                      </a:pPr>
-                      <a:r>
-                        <a:t>dcf:</a:t>
-                      </a:r>
-                    </a:p>
-                  </a:txBody>
-                  <a:tcPr>
-                    <a:solidFill>
-                      <a:srgbClr val="111827"/>
-                    </a:solidFill>
-                  </a:tcPr>
-                </a:tc>
-                <a:tc>
-                  <a:txBody>
-                    <a:bodyPr/>
-                    <a:lstStyle/>
-                    <a:p>
-                      <a:pPr>
-                        <a:defRPr sz="1000" b="0">
-                          <a:solidFill>
-                            <a:srgbClr val="F8FAFC"/>
-                          </a:solidFill>
-                        </a:defRPr>
-                      </a:pPr>
-                      <a:r>
-                        <a:t>DCF Valuer</a:t>
-                      </a:r>
-                    </a:p>
-                  </a:txBody>
-                  <a:tcPr>
-                    <a:solidFill>
-                      <a:srgbClr val="111827"/>
-                    </a:solidFill>
-                  </a:tcPr>
-                </a:tc>
-                <a:tc>
-                  <a:txBody>
-                    <a:bodyPr/>
-                    <a:lstStyle/>
-                    <a:p>
-                      <a:pPr>
-                        <a:defRPr sz="1000" b="0">
-                          <a:solidFill>
-                            <a:srgbClr val="F8FAFC"/>
-                          </a:solidFill>
-                        </a:defRPr>
-                      </a:pPr>
-                      <a:r>
-                        <a:t>Discounted cash flow model</a:t>
-                      </a:r>
-                    </a:p>
-                  </a:txBody>
-                  <a:tcPr>
-                    <a:solidFill>
-                      <a:srgbClr val="111827"/>
-                    </a:solidFill>
-                  </a:tcPr>
-                </a:tc>
-              </a:tr>
-              <a:tr h="209550">
-                <a:tc>
-                  <a:txBody>
-                    <a:bodyPr/>
-                    <a:lstStyle/>
-                    <a:p>
-                      <a:pPr>
-                        <a:defRPr sz="1000" b="0">
-                          <a:solidFill>
-                            <a:srgbClr val="F8FAFC"/>
-                          </a:solidFill>
-                        </a:defRPr>
-                      </a:pPr>
-                      <a:r>
-                        <a:t>multi:</a:t>
-                      </a:r>
-                    </a:p>
-                  </a:txBody>
-                  <a:tcPr>
-                    <a:solidFill>
-                      <a:srgbClr val="111827"/>
-                    </a:solidFill>
-                  </a:tcPr>
-                </a:tc>
-                <a:tc>
-                  <a:txBody>
-                    <a:bodyPr/>
-                    <a:lstStyle/>
-                    <a:p>
-                      <a:pPr>
-                        <a:defRPr sz="1000" b="0">
-                          <a:solidFill>
-                            <a:srgbClr val="F8FAFC"/>
-                          </a:solidFill>
-                        </a:defRPr>
-                      </a:pPr>
-                      <a:r>
-                        <a:t>Multiples Valuer</a:t>
-                      </a:r>
-                    </a:p>
-                  </a:txBody>
-                  <a:tcPr>
-                    <a:solidFill>
-                      <a:srgbClr val="111827"/>
-                    </a:solidFill>
-                  </a:tcPr>
-                </a:tc>
-                <a:tc>
-                  <a:txBody>
-                    <a:bodyPr/>
-                    <a:lstStyle/>
-                    <a:p>
-                      <a:pPr>
-                        <a:defRPr sz="1000" b="0">
-                          <a:solidFill>
-                            <a:srgbClr val="F8FAFC"/>
-                          </a:solidFill>
-                        </a:defRPr>
-                      </a:pPr>
-                      <a:r>
-                        <a:t>EV/Revenue, EV/EBITDA comps</a:t>
-                      </a:r>
-                    </a:p>
-                  </a:txBody>
-                  <a:tcPr>
-                    <a:solidFill>
-                      <a:srgbClr val="111827"/>
-                    </a:solidFill>
-                  </a:tcPr>
-                </a:tc>
-              </a:tr>
-              <a:tr h="209550">
-                <a:tc>
-                  <a:txBody>
-                    <a:bodyPr/>
-                    <a:lstStyle/>
-                    <a:p>
-                      <a:pPr>
-                        <a:defRPr sz="1000" b="0">
-                          <a:solidFill>
-                            <a:srgbClr val="F8FAFC"/>
-                          </a:solidFill>
-                        </a:defRPr>
-                      </a:pPr>
-                      <a:r>
-                        <a:t>comps:</a:t>
-                      </a:r>
-                    </a:p>
-                  </a:txBody>
-                  <a:tcPr>
-                    <a:solidFill>
-                      <a:srgbClr val="111827"/>
-                    </a:solidFill>
-                  </a:tcPr>
-                </a:tc>
-                <a:tc>
-                  <a:txBody>
-                    <a:bodyPr/>
-                    <a:lstStyle/>
-                    <a:p>
-                      <a:pPr>
-                        <a:defRPr sz="1000" b="0">
-                          <a:solidFill>
-                            <a:srgbClr val="F8FAFC"/>
-                          </a:solidFill>
-                        </a:defRPr>
-                      </a:pPr>
-                      <a:r>
-                        <a:t>Comps Finder</a:t>
-                      </a:r>
-                    </a:p>
-                  </a:txBody>
-                  <a:tcPr>
-                    <a:solidFill>
-                      <a:srgbClr val="111827"/>
-                    </a:solidFill>
-                  </a:tcPr>
-                </a:tc>
-                <a:tc>
-                  <a:txBody>
-                    <a:bodyPr/>
-                    <a:lstStyle/>
-                    <a:p>
-                      <a:pPr>
-                        <a:defRPr sz="1000" b="0">
-                          <a:solidFill>
-                            <a:srgbClr val="F8FAFC"/>
-                          </a:solidFill>
-                        </a:defRPr>
-                      </a:pPr>
-                      <a:r>
-                        <a:t>Comparable transactions</a:t>
-                      </a:r>
-                    </a:p>
-                  </a:txBody>
-                  <a:tcPr>
-                    <a:solidFill>
-                      <a:srgbClr val="111827"/>
-                    </a:solidFill>
-                  </a:tcPr>
-                </a:tc>
-              </a:tr>
-              <a:tr h="209550">
-                <a:tc>
-                  <a:txBody>
-                    <a:bodyPr/>
-                    <a:lstStyle/>
-                    <a:p>
-                      <a:pPr>
-                        <a:defRPr sz="1000" b="0">
-                          <a:solidFill>
-                            <a:srgbClr val="F8FAFC"/>
-                          </a:solidFill>
-                        </a:defRPr>
-                      </a:pPr>
-                      <a:r>
-                        <a:t>ltm:</a:t>
-                      </a:r>
-                    </a:p>
-                  </a:txBody>
-                  <a:tcPr>
-                    <a:solidFill>
-                      <a:srgbClr val="111827"/>
-                    </a:solidFill>
-                  </a:tcPr>
-                </a:tc>
-                <a:tc>
-                  <a:txBody>
-                    <a:bodyPr/>
-                    <a:lstStyle/>
-                    <a:p>
-                      <a:pPr>
-                        <a:defRPr sz="1000" b="0">
-                          <a:solidFill>
-                            <a:srgbClr val="F8FAFC"/>
-                          </a:solidFill>
-                        </a:defRPr>
-                      </a:pPr>
-                      <a:r>
-                        <a:t>LTM Normalizer</a:t>
-                      </a:r>
-                    </a:p>
-                  </a:txBody>
-                  <a:tcPr>
-                    <a:solidFill>
-                      <a:srgbClr val="111827"/>
-                    </a:solidFill>
-                  </a:tcPr>
-                </a:tc>
-                <a:tc>
-                  <a:txBody>
-                    <a:bodyPr/>
-                    <a:lstStyle/>
-                    <a:p>
-                      <a:pPr>
-                        <a:defRPr sz="1000" b="0">
-                          <a:solidFill>
-                            <a:srgbClr val="F8FAFC"/>
-                          </a:solidFill>
-                        </a:defRPr>
-                      </a:pPr>
-                      <a:r>
-                        <a:t>Normalize trailing-twelve-month P&amp;L</a:t>
-                      </a:r>
-                    </a:p>
-                  </a:txBody>
-                  <a:tcPr>
-                    <a:solidFill>
-                      <a:srgbClr val="111827"/>
-                    </a:solidFill>
-                  </a:tcPr>
-                </a:tc>
-              </a:tr>
-              <a:tr h="209550">
-                <a:tc>
-                  <a:txBody>
-                    <a:bodyPr/>
-                    <a:lstStyle/>
-                    <a:p>
-                      <a:pPr>
-                        <a:defRPr sz="1000" b="0">
-                          <a:solidFill>
-                            <a:srgbClr val="F8FAFC"/>
-                          </a:solidFill>
-                        </a:defRPr>
-                      </a:pPr>
-                      <a:r>
-                        <a:t>synergy:</a:t>
-                      </a:r>
-                    </a:p>
-                  </a:txBody>
-                  <a:tcPr>
-                    <a:solidFill>
-                      <a:srgbClr val="111827"/>
-                    </a:solidFill>
-                  </a:tcPr>
-                </a:tc>
-                <a:tc>
-                  <a:txBody>
-                    <a:bodyPr/>
-                    <a:lstStyle/>
-                    <a:p>
-                      <a:pPr>
-                        <a:defRPr sz="1000" b="0">
-                          <a:solidFill>
-                            <a:srgbClr val="F8FAFC"/>
-                          </a:solidFill>
-                        </a:defRPr>
-                      </a:pPr>
-                      <a:r>
-                        <a:t>Synergy Analyst</a:t>
-                      </a:r>
-                    </a:p>
-                  </a:txBody>
-                  <a:tcPr>
-                    <a:solidFill>
-                      <a:srgbClr val="111827"/>
-                    </a:solidFill>
-                  </a:tcPr>
-                </a:tc>
-                <a:tc>
-                  <a:txBody>
-                    <a:bodyPr/>
-                    <a:lstStyle/>
-                    <a:p>
-                      <a:pPr>
-                        <a:defRPr sz="1000" b="0">
-                          <a:solidFill>
-                            <a:srgbClr val="F8FAFC"/>
-                          </a:solidFill>
-                        </a:defRPr>
-                      </a:pPr>
-                      <a:r>
-                        <a:t>Revenue and cost synergy modelling</a:t>
-                      </a:r>
-                    </a:p>
-                  </a:txBody>
-                  <a:tcPr>
-                    <a:solidFill>
-                      <a:srgbClr val="111827"/>
-                    </a:solidFill>
-                  </a:tcPr>
-                </a:tc>
-              </a:tr>
-              <a:tr h="209550">
-                <a:tc>
-                  <a:txBody>
-                    <a:bodyPr/>
-                    <a:lstStyle/>
-                    <a:p>
-                      <a:pPr>
-                        <a:defRPr sz="1000" b="0">
-                          <a:solidFill>
-                            <a:srgbClr val="F8FAFC"/>
-                          </a:solidFill>
-                        </a:defRPr>
-                      </a:pPr>
-                      <a:r>
-                        <a:t>score</a:t>
-                      </a:r>
-                    </a:p>
-                  </a:txBody>
-                  <a:tcPr>
-                    <a:solidFill>
-                      <a:srgbClr val="111827"/>
-                    </a:solidFill>
-                  </a:tcPr>
-                </a:tc>
-                <a:tc>
-                  <a:txBody>
-                    <a:bodyPr/>
-                    <a:lstStyle/>
-                    <a:p>
-                      <a:pPr>
-                        <a:defRPr sz="1000" b="0">
-                          <a:solidFill>
-                            <a:srgbClr val="F8FAFC"/>
-                          </a:solidFill>
-                        </a:defRPr>
-                      </a:pPr>
-                      <a:r>
-                        <a:t>Match Scorer</a:t>
-                      </a:r>
-                    </a:p>
-                  </a:txBody>
-                  <a:tcPr>
-                    <a:solidFill>
-                      <a:srgbClr val="111827"/>
-                    </a:solidFill>
-                  </a:tcPr>
-                </a:tc>
-                <a:tc>
-                  <a:txBody>
-                    <a:bodyPr/>
-                    <a:lstStyle/>
-                    <a:p>
-                      <a:pPr>
-                        <a:defRPr sz="1000" b="0">
-                          <a:solidFill>
-                            <a:srgbClr val="F8FAFC"/>
-                          </a:solidFill>
-                        </a:defRPr>
-                      </a:pPr>
-                      <a:r>
-                        <a:t>7-dimension buyer-target scoring</a:t>
-                      </a:r>
-                    </a:p>
-                  </a:txBody>
-                  <a:tcPr>
-                    <a:solidFill>
-                      <a:srgbClr val="111827"/>
-                    </a:solidFill>
-                  </a:tcPr>
-                </a:tc>
-              </a:tr>
-              <a:tr h="209550">
-                <a:tc>
-                  <a:txBody>
-                    <a:bodyPr/>
-                    <a:lstStyle/>
-                    <a:p>
-                      <a:pPr>
-                        <a:defRPr sz="1000" b="0">
-                          <a:solidFill>
-                            <a:srgbClr val="F8FAFC"/>
-                          </a:solidFill>
-                        </a:defRPr>
-                      </a:pPr>
-                      <a:r>
-                        <a:t>vdr:</a:t>
-                      </a:r>
-                    </a:p>
-                  </a:txBody>
-                  <a:tcPr>
-                    <a:solidFill>
-                      <a:srgbClr val="111827"/>
-                    </a:solidFill>
-                  </a:tcPr>
-                </a:tc>
-                <a:tc>
-                  <a:txBody>
-                    <a:bodyPr/>
-                    <a:lstStyle/>
-                    <a:p>
-                      <a:pPr>
-                        <a:defRPr sz="1000" b="0">
-                          <a:solidFill>
-                            <a:srgbClr val="F8FAFC"/>
-                          </a:solidFill>
-                        </a:defRPr>
-                      </a:pPr>
-                      <a:r>
-                        <a:t>VDR Auditor</a:t>
-                      </a:r>
-                    </a:p>
-                  </a:txBody>
-                  <a:tcPr>
-                    <a:solidFill>
-                      <a:srgbClr val="111827"/>
-                    </a:solidFill>
-                  </a:tcPr>
-                </a:tc>
-                <a:tc>
-                  <a:txBody>
-                    <a:bodyPr/>
-                    <a:lstStyle/>
-                    <a:p>
-                      <a:pPr>
-                        <a:defRPr sz="1000" b="0">
-                          <a:solidFill>
-                            <a:srgbClr val="F8FAFC"/>
-                          </a:solidFill>
-                        </a:defRPr>
-                      </a:pPr>
-                      <a:r>
-                        <a:t>Audit data room completeness</a:t>
-                      </a:r>
-                    </a:p>
-                  </a:txBody>
-                  <a:tcPr>
-                    <a:solidFill>
-                      <a:srgbClr val="111827"/>
-                    </a:solidFill>
-                  </a:tcPr>
-                </a:tc>
-              </a:tr>
-              <a:tr h="209550">
-                <a:tc>
-                  <a:txBody>
-                    <a:bodyPr/>
-                    <a:lstStyle/>
-                    <a:p>
-                      <a:pPr>
-                        <a:defRPr sz="1000" b="0">
-                          <a:solidFill>
-                            <a:srgbClr val="F8FAFC"/>
-                          </a:solidFill>
-                        </a:defRPr>
-                      </a:pPr>
-                      <a:r>
-                        <a:t>abstract:</a:t>
-                      </a:r>
-                    </a:p>
-                  </a:txBody>
-                  <a:tcPr>
-                    <a:solidFill>
-                      <a:srgbClr val="111827"/>
-                    </a:solidFill>
-                  </a:tcPr>
-                </a:tc>
-                <a:tc>
-                  <a:txBody>
-                    <a:bodyPr/>
-                    <a:lstStyle/>
-                    <a:p>
-                      <a:pPr>
-                        <a:defRPr sz="1000" b="0">
-                          <a:solidFill>
-                            <a:srgbClr val="F8FAFC"/>
-                          </a:solidFill>
-                        </a:defRPr>
-                      </a:pPr>
-                      <a:r>
-                        <a:t>Contract Abstractor</a:t>
-                      </a:r>
-                    </a:p>
-                  </a:txBody>
-                  <a:tcPr>
-                    <a:solidFill>
-                      <a:srgbClr val="111827"/>
-                    </a:solidFill>
-                  </a:tcPr>
-                </a:tc>
-                <a:tc>
-                  <a:txBody>
-                    <a:bodyPr/>
-                    <a:lstStyle/>
-                    <a:p>
-                      <a:pPr>
-                        <a:defRPr sz="1000" b="0">
-                          <a:solidFill>
-                            <a:srgbClr val="F8FAFC"/>
-                          </a:solidFill>
-                        </a:defRPr>
-                      </a:pPr>
-                      <a:r>
-                        <a:t>Extract key terms from contracts</a:t>
-                      </a:r>
-                    </a:p>
-                  </a:txBody>
-                  <a:tcPr>
-                    <a:solidFill>
-                      <a:srgbClr val="111827"/>
-                    </a:solidFill>
-                  </a:tcPr>
-                </a:tc>
-              </a:tr>
-              <a:tr h="209550">
-                <a:tc>
-                  <a:txBody>
-                    <a:bodyPr/>
-                    <a:lstStyle/>
-                    <a:p>
-                      <a:pPr>
-                        <a:defRPr sz="1000" b="0">
-                          <a:solidFill>
-                            <a:srgbClr val="F8FAFC"/>
-                          </a:solidFill>
-                        </a:defRPr>
-                      </a:pPr>
-                      <a:r>
-                        <a:t>legal:</a:t>
-                      </a:r>
-                    </a:p>
-                  </a:txBody>
-                  <a:tcPr>
-                    <a:solidFill>
-                      <a:srgbClr val="111827"/>
-                    </a:solidFill>
-                  </a:tcPr>
-                </a:tc>
-                <a:tc>
-                  <a:txBody>
-                    <a:bodyPr/>
-                    <a:lstStyle/>
-                    <a:p>
-                      <a:pPr>
-                        <a:defRPr sz="1000" b="0">
-                          <a:solidFill>
-                            <a:srgbClr val="F8FAFC"/>
-                          </a:solidFill>
-                        </a:defRPr>
-                      </a:pPr>
-                      <a:r>
-                        <a:t>Legal Reviewer</a:t>
-                      </a:r>
-                    </a:p>
-                  </a:txBody>
-                  <a:tcPr>
-                    <a:solidFill>
-                      <a:srgbClr val="111827"/>
-                    </a:solidFill>
-                  </a:tcPr>
-                </a:tc>
-                <a:tc>
-                  <a:txBody>
-                    <a:bodyPr/>
-                    <a:lstStyle/>
-                    <a:p>
-                      <a:pPr>
-                        <a:defRPr sz="1000" b="0">
-                          <a:solidFill>
-                            <a:srgbClr val="F8FAFC"/>
-                          </a:solidFill>
-                        </a:defRPr>
-                      </a:pPr>
-                      <a:r>
-                        <a:t>Open litigation and legal risk</a:t>
-                      </a:r>
-                    </a:p>
-                  </a:txBody>
-                  <a:tcPr>
-                    <a:solidFill>
-                      <a:srgbClr val="111827"/>
-                    </a:solidFill>
-                  </a:tcPr>
-                </a:tc>
-              </a:tr>
-              <a:tr h="209550">
-                <a:tc>
-                  <a:txBody>
-                    <a:bodyPr/>
-                    <a:lstStyle/>
-                    <a:p>
-                      <a:pPr>
-                        <a:defRPr sz="1000" b="0">
-                          <a:solidFill>
-                            <a:srgbClr val="F8FAFC"/>
-                          </a:solidFill>
-                        </a:defRPr>
-                      </a:pPr>
-                      <a:r>
-                        <a:t>ops:</a:t>
-                      </a:r>
-                    </a:p>
-                  </a:txBody>
-                  <a:tcPr>
-                    <a:solidFill>
-                      <a:srgbClr val="111827"/>
-                    </a:solidFill>
-                  </a:tcPr>
-                </a:tc>
-                <a:tc>
-                  <a:txBody>
-                    <a:bodyPr/>
-                    <a:lstStyle/>
-                    <a:p>
-                      <a:pPr>
-                        <a:defRPr sz="1000" b="0">
-                          <a:solidFill>
-                            <a:srgbClr val="F8FAFC"/>
-                          </a:solidFill>
-                        </a:defRPr>
-                      </a:pPr>
-                      <a:r>
-                        <a:t>Operational DD</a:t>
-                      </a:r>
-                    </a:p>
-                  </a:txBody>
-                  <a:tcPr>
-                    <a:solidFill>
-                      <a:srgbClr val="111827"/>
-                    </a:solidFill>
-                  </a:tcPr>
-                </a:tc>
-                <a:tc>
-                  <a:txBody>
-                    <a:bodyPr/>
-                    <a:lstStyle/>
-                    <a:p>
-                      <a:pPr>
-                        <a:defRPr sz="1000" b="0">
-                          <a:solidFill>
-                            <a:srgbClr val="F8FAFC"/>
-                          </a:solidFill>
-                        </a:defRPr>
-                      </a:pPr>
-                      <a:r>
-                        <a:t>Working capital and operations review</a:t>
-                      </a:r>
-                    </a:p>
-                  </a:txBody>
-                  <a:tcPr>
-                    <a:solidFill>
-                      <a:srgbClr val="111827"/>
-                    </a:solidFill>
-                  </a:tcPr>
-                </a:tc>
-              </a:tr>
-              <a:tr h="209550">
-                <a:tc>
-                  <a:txBody>
-                    <a:bodyPr/>
-                    <a:lstStyle/>
-                    <a:p>
-                      <a:pPr>
-                        <a:defRPr sz="1000" b="0">
-                          <a:solidFill>
-                            <a:srgbClr val="F8FAFC"/>
-                          </a:solidFill>
-                        </a:defRPr>
-                      </a:pPr>
-                      <a:r>
-                        <a:t>esg:</a:t>
-                      </a:r>
-                    </a:p>
-                  </a:txBody>
-                  <a:tcPr>
-                    <a:solidFill>
-                      <a:srgbClr val="111827"/>
-                    </a:solidFill>
-                  </a:tcPr>
-                </a:tc>
-                <a:tc>
-                  <a:txBody>
-                    <a:bodyPr/>
-                    <a:lstStyle/>
-                    <a:p>
-                      <a:pPr>
-                        <a:defRPr sz="1000" b="0">
-                          <a:solidFill>
-                            <a:srgbClr val="F8FAFC"/>
-                          </a:solidFill>
-                        </a:defRPr>
-                      </a:pPr>
-                      <a:r>
-                        <a:t>ESG Reviewer</a:t>
-                      </a:r>
-                    </a:p>
-                  </a:txBody>
-                  <a:tcPr>
-                    <a:solidFill>
-                      <a:srgbClr val="111827"/>
-                    </a:solidFill>
-                  </a:tcPr>
-                </a:tc>
-                <a:tc>
-                  <a:txBody>
-                    <a:bodyPr/>
-                    <a:lstStyle/>
-                    <a:p>
-                      <a:pPr>
-                        <a:defRPr sz="1000" b="0">
-                          <a:solidFill>
-                            <a:srgbClr val="F8FAFC"/>
-                          </a:solidFill>
-                        </a:defRPr>
-                      </a:pPr>
-                      <a:r>
-                        <a:t>Environmental, social, governance screening</a:t>
-                      </a:r>
-                    </a:p>
-                  </a:txBody>
-                  <a:tcPr>
-                    <a:solidFill>
-                      <a:srgbClr val="111827"/>
-                    </a:solidFill>
-                  </a:tcPr>
-                </a:tc>
-              </a:tr>
-              <a:tr h="209550">
-                <a:tc>
-                  <a:txBody>
-                    <a:bodyPr/>
-                    <a:lstStyle/>
-                    <a:p>
-                      <a:pPr>
-                        <a:defRPr sz="1000" b="0">
-                          <a:solidFill>
-                            <a:srgbClr val="F8FAFC"/>
-                          </a:solidFill>
-                        </a:defRPr>
-                      </a:pPr>
-                      <a:r>
-                        <a:t>memo:</a:t>
-                      </a:r>
-                    </a:p>
-                  </a:txBody>
-                  <a:tcPr>
-                    <a:solidFill>
-                      <a:srgbClr val="111827"/>
-                    </a:solidFill>
-                  </a:tcPr>
-                </a:tc>
-                <a:tc>
-                  <a:txBody>
-                    <a:bodyPr/>
-                    <a:lstStyle/>
-                    <a:p>
-                      <a:pPr>
-                        <a:defRPr sz="1000" b="0">
-                          <a:solidFill>
-                            <a:srgbClr val="F8FAFC"/>
-                          </a:solidFill>
-                        </a:defRPr>
-                      </a:pPr>
-                      <a:r>
-                        <a:t>IC Memo Writer</a:t>
-                      </a:r>
-                    </a:p>
-                  </a:txBody>
-                  <a:tcPr>
-                    <a:solidFill>
-                      <a:srgbClr val="111827"/>
-                    </a:solidFill>
-                  </a:tcPr>
-                </a:tc>
-                <a:tc>
-                  <a:txBody>
-                    <a:bodyPr/>
-                    <a:lstStyle/>
-                    <a:p>
-                      <a:pPr>
-                        <a:defRPr sz="1000" b="0">
-                          <a:solidFill>
-                            <a:srgbClr val="F8FAFC"/>
-                          </a:solidFill>
-                        </a:defRPr>
-                      </a:pPr>
-                      <a:r>
-                        <a:t>Draft an investment committee memo</a:t>
-                      </a:r>
-                    </a:p>
-                  </a:txBody>
-                  <a:tcPr>
-                    <a:solidFill>
-                      <a:srgbClr val="111827"/>
-                    </a:solidFill>
-                  </a:tcPr>
-                </a:tc>
-              </a:tr>
-              <a:tr h="209550">
-                <a:tc>
-                  <a:txBody>
-                    <a:bodyPr/>
-                    <a:lstStyle/>
-                    <a:p>
-                      <a:pPr>
-                        <a:defRPr sz="1000" b="0">
-                          <a:solidFill>
-                            <a:srgbClr val="F8FAFC"/>
-                          </a:solidFill>
-                        </a:defRPr>
-                      </a:pPr>
-                      <a:r>
-                        <a:t>teaser:</a:t>
-                      </a:r>
-                    </a:p>
-                  </a:txBody>
-                  <a:tcPr>
-                    <a:solidFill>
-                      <a:srgbClr val="111827"/>
-                    </a:solidFill>
-                  </a:tcPr>
-                </a:tc>
-                <a:tc>
-                  <a:txBody>
-                    <a:bodyPr/>
-                    <a:lstStyle/>
-                    <a:p>
-                      <a:pPr>
-                        <a:defRPr sz="1000" b="0">
-                          <a:solidFill>
-                            <a:srgbClr val="F8FAFC"/>
-                          </a:solidFill>
-                        </a:defRPr>
-                      </a:pPr>
-                      <a:r>
-                        <a:t>Teaser Designer</a:t>
-                      </a:r>
-                    </a:p>
-                  </a:txBody>
-                  <a:tcPr>
-                    <a:solidFill>
-                      <a:srgbClr val="111827"/>
-                    </a:solidFill>
-                  </a:tcPr>
-                </a:tc>
-                <a:tc>
-                  <a:txBody>
-                    <a:bodyPr/>
-                    <a:lstStyle/>
-                    <a:p>
-                      <a:pPr>
-                        <a:defRPr sz="1000" b="0">
-                          <a:solidFill>
-                            <a:srgbClr val="F8FAFC"/>
-                          </a:solidFill>
-                        </a:defRPr>
-                      </a:pPr>
-                      <a:r>
-                        <a:t>Blind teaser for sell-side</a:t>
-                      </a:r>
-                    </a:p>
-                  </a:txBody>
-                  <a:tcPr>
-                    <a:solidFill>
-                      <a:srgbClr val="111827"/>
-                    </a:solidFill>
-                  </a:tcPr>
-                </a:tc>
-              </a:tr>
-              <a:tr h="209550">
-                <a:tc>
-                  <a:txBody>
-                    <a:bodyPr/>
-                    <a:lstStyle/>
-                    <a:p>
-                      <a:pPr>
-                        <a:defRPr sz="1000" b="0">
-                          <a:solidFill>
-                            <a:srgbClr val="F8FAFC"/>
-                          </a:solidFill>
-                        </a:defRPr>
-                      </a:pPr>
-                      <a:r>
-                        <a:t>bid:</a:t>
-                      </a:r>
-                    </a:p>
-                  </a:txBody>
-                  <a:tcPr>
-                    <a:solidFill>
-                      <a:srgbClr val="111827"/>
-                    </a:solidFill>
-                  </a:tcPr>
-                </a:tc>
-                <a:tc>
-                  <a:txBody>
-                    <a:bodyPr/>
-                    <a:lstStyle/>
-                    <a:p>
-                      <a:pPr>
-                        <a:defRPr sz="1000" b="0">
-                          <a:solidFill>
-                            <a:srgbClr val="F8FAFC"/>
-                          </a:solidFill>
-                        </a:defRPr>
-                      </a:pPr>
-                      <a:r>
-                        <a:t>Bid Strategist</a:t>
-                      </a:r>
-                    </a:p>
-                  </a:txBody>
-                  <a:tcPr>
-                    <a:solidFill>
-                      <a:srgbClr val="111827"/>
-                    </a:solidFill>
-                  </a:tcPr>
-                </a:tc>
-                <a:tc>
-                  <a:txBody>
-                    <a:bodyPr/>
-                    <a:lstStyle/>
-                    <a:p>
-                      <a:pPr>
-                        <a:defRPr sz="1000" b="0">
-                          <a:solidFill>
-                            <a:srgbClr val="F8FAFC"/>
-                          </a:solidFill>
-                        </a:defRPr>
-                      </a:pPr>
-                      <a:r>
-                        <a:t>Cash/stock mix and offer structuring</a:t>
-                      </a:r>
-                    </a:p>
-                  </a:txBody>
-                  <a:tcPr>
-                    <a:solidFill>
-                      <a:srgbClr val="111827"/>
-                    </a:solidFill>
-                  </a:tcPr>
-                </a:tc>
-              </a:tr>
-              <a:tr h="209550">
-                <a:tc>
-                  <a:txBody>
-                    <a:bodyPr/>
-                    <a:lstStyle/>
-                    <a:p>
-                      <a:pPr>
-                        <a:defRPr sz="1000" b="0">
-                          <a:solidFill>
-                            <a:srgbClr val="F8FAFC"/>
-                          </a:solidFill>
-                        </a:defRPr>
-                      </a:pPr>
-                      <a:r>
-                        <a:t>ipo:</a:t>
-                      </a:r>
-                    </a:p>
-                  </a:txBody>
-                  <a:tcPr>
-                    <a:solidFill>
-                      <a:srgbClr val="111827"/>
-                    </a:solidFill>
-                  </a:tcPr>
-                </a:tc>
-                <a:tc>
-                  <a:txBody>
-                    <a:bodyPr/>
-                    <a:lstStyle/>
-                    <a:p>
-                      <a:pPr>
-                        <a:defRPr sz="1000" b="0">
-                          <a:solidFill>
-                            <a:srgbClr val="F8FAFC"/>
-                          </a:solidFill>
-                        </a:defRPr>
-                      </a:pPr>
-                      <a:r>
-                        <a:t>IPO Readiness</a:t>
-                      </a:r>
-                    </a:p>
-                  </a:txBody>
-                  <a:tcPr>
-                    <a:solidFill>
-                      <a:srgbClr val="111827"/>
-                    </a:solidFill>
-                  </a:tcPr>
-                </a:tc>
-                <a:tc>
-                  <a:txBody>
-                    <a:bodyPr/>
-                    <a:lstStyle/>
-                    <a:p>
-                      <a:pPr>
-                        <a:defRPr sz="1000" b="0">
-                          <a:solidFill>
-                            <a:srgbClr val="F8FAFC"/>
-                          </a:solidFill>
-                        </a:defRPr>
-                      </a:pPr>
-                      <a:r>
-                        <a:t>Assess public offering readiness</a:t>
-                      </a:r>
-                    </a:p>
-                  </a:txBody>
-                  <a:tcPr>
-                    <a:solidFill>
-                      <a:srgbClr val="111827"/>
-                    </a:solidFill>
-                  </a:tcPr>
-                </a:tc>
-              </a:tr>
-              <a:tr h="209550">
-                <a:tc>
-                  <a:txBody>
-                    <a:bodyPr/>
-                    <a:lstStyle/>
-                    <a:p>
-                      <a:pPr>
-                        <a:defRPr sz="1000" b="0">
-                          <a:solidFill>
-                            <a:srgbClr val="F8FAFC"/>
-                          </a:solidFill>
-                        </a:defRPr>
-                      </a:pPr>
-                      <a:r>
-                        <a:t>integrate:</a:t>
-                      </a:r>
-                    </a:p>
-                  </a:txBody>
-                  <a:tcPr>
-                    <a:solidFill>
-                      <a:srgbClr val="111827"/>
-                    </a:solidFill>
-                  </a:tcPr>
-                </a:tc>
-                <a:tc>
-                  <a:txBody>
-                    <a:bodyPr/>
-                    <a:lstStyle/>
-                    <a:p>
-                      <a:pPr>
-                        <a:defRPr sz="1000" b="0">
-                          <a:solidFill>
-                            <a:srgbClr val="F8FAFC"/>
-                          </a:solidFill>
-                        </a:defRPr>
-                      </a:pPr>
-                      <a:r>
-                        <a:t>Integration Planner</a:t>
-                      </a:r>
-                    </a:p>
-                  </a:txBody>
-                  <a:tcPr>
-                    <a:solidFill>
-                      <a:srgbClr val="111827"/>
-                    </a:solidFill>
-                  </a:tcPr>
-                </a:tc>
-                <a:tc>
-                  <a:txBody>
-                    <a:bodyPr/>
-                    <a:lstStyle/>
-                    <a:p>
-                      <a:pPr>
-                        <a:defRPr sz="1000" b="0">
-                          <a:solidFill>
-                            <a:srgbClr val="F8FAFC"/>
-                          </a:solidFill>
-                        </a:defRPr>
-                      </a:pPr>
-                      <a:r>
-                        <a:t>Post-merger 100-day plan</a:t>
-                      </a:r>
-                    </a:p>
-                  </a:txBody>
-                  <a:tcPr>
-                    <a:solidFill>
-                      <a:srgbClr val="111827"/>
-                    </a:solidFill>
-                  </a:tcPr>
-                </a:tc>
-              </a:tr>
-              <a:tr h="209550">
-                <a:tc>
-                  <a:txBody>
-                    <a:bodyPr/>
-                    <a:lstStyle/>
-                    <a:p>
-                      <a:pPr>
-                        <a:defRPr sz="1000" b="0">
-                          <a:solidFill>
-                            <a:srgbClr val="F8FAFC"/>
-                          </a:solidFill>
-                        </a:defRPr>
-                      </a:pPr>
-                      <a:r>
-                        <a:t>research:</a:t>
-                      </a:r>
-                    </a:p>
-                  </a:txBody>
-                  <a:tcPr>
-                    <a:solidFill>
-                      <a:srgbClr val="111827"/>
-                    </a:solidFill>
-                  </a:tcPr>
-                </a:tc>
-                <a:tc>
-                  <a:txBody>
-                    <a:bodyPr/>
-                    <a:lstStyle/>
-                    <a:p>
-                      <a:pPr>
-                        <a:defRPr sz="1000" b="0">
-                          <a:solidFill>
-                            <a:srgbClr val="F8FAFC"/>
-                          </a:solidFill>
-                        </a:defRPr>
-                      </a:pPr>
-                      <a:r>
-                        <a:t>Research Analyst</a:t>
-                      </a:r>
-                    </a:p>
-                  </a:txBody>
-                  <a:tcPr>
-                    <a:solidFill>
-                      <a:srgbClr val="111827"/>
-                    </a:solidFill>
-                  </a:tcPr>
-                </a:tc>
-                <a:tc>
-                  <a:txBody>
-                    <a:bodyPr/>
-                    <a:lstStyle/>
-                    <a:p>
-                      <a:pPr>
-                        <a:defRPr sz="1000" b="0">
-                          <a:solidFill>
-                            <a:srgbClr val="F8FAFC"/>
-                          </a:solidFill>
-                        </a:defRPr>
-                      </a:pPr>
-                      <a:r>
-                        <a:t>Deep web + semantic research</a:t>
-                      </a:r>
-                    </a:p>
-                  </a:txBody>
-                  <a:tcPr>
-                    <a:solidFill>
-                      <a:srgbClr val="111827"/>
-                    </a:solidFill>
-                  </a:tcPr>
-                </a:tc>
-              </a:tr>
-              <a:tr h="209550">
-                <a:tc>
-                  <a:txBody>
-                    <a:bodyPr/>
-                    <a:lstStyle/>
-                    <a:p>
-                      <a:pPr>
-                        <a:defRPr sz="1000" b="0">
-                          <a:solidFill>
-                            <a:srgbClr val="F8FAFC"/>
-                          </a:solidFill>
-                        </a:defRPr>
-                      </a:pPr>
-                      <a:r>
-                        <a:t>hedgefunds:</a:t>
-                      </a:r>
-                    </a:p>
-                  </a:txBody>
-                  <a:tcPr>
-                    <a:solidFill>
-                      <a:srgbClr val="111827"/>
-                    </a:solidFill>
-                  </a:tcPr>
-                </a:tc>
-                <a:tc>
-                  <a:txBody>
-                    <a:bodyPr/>
-                    <a:lstStyle/>
-                    <a:p>
-                      <a:pPr>
-                        <a:defRPr sz="1000" b="0">
-                          <a:solidFill>
-                            <a:srgbClr val="F8FAFC"/>
-                          </a:solidFill>
-                        </a:defRPr>
-                      </a:pPr>
-                      <a:r>
-                        <a:t>Hedge Fund Analyst</a:t>
-                      </a:r>
-                    </a:p>
-                  </a:txBody>
-                  <a:tcPr>
-                    <a:solidFill>
-                      <a:srgbClr val="111827"/>
-                    </a:solidFill>
-                  </a:tcPr>
-                </a:tc>
-                <a:tc>
-                  <a:txBody>
-                    <a:bodyPr/>
-                    <a:lstStyle/>
-                    <a:p>
-                      <a:pPr>
-                        <a:defRPr sz="1000" b="0">
-                          <a:solidFill>
-                            <a:srgbClr val="F8FAFC"/>
-                          </a:solidFill>
-                        </a:defRPr>
-                      </a:pPr>
-                      <a:r>
-                        <a:t>SEC 13F holdings, fund AUM, activist filings</a:t>
-                      </a:r>
-                    </a:p>
-                  </a:txBody>
-                  <a:tcPr>
-                    <a:solidFill>
-                      <a:srgbClr val="111827"/>
-                    </a:solidFill>
-                  </a:tcPr>
-                </a:tc>
-              </a:tr>
-            </a:tbl>
-          </a:graphicData>
-        </a:graphic>
-      </p:graphicFrame>
+        </p:nvSpPr>
+        <p:spPr>
+          <a:xfrm>
+            <a:off x="731520" y="1005840"/>
+            <a:ext cx="10515600" cy="5303520"/>
+          </a:xfrm>
+          <a:prstGeom prst="rect">
+            <a:avLst/>
+          </a:prstGeom>
+          <a:noFill/>
+        </p:spPr>
+        <p:txBody>
+          <a:bodyPr wrap="square">
+            <a:spAutoFit/>
+          </a:bodyPr>
+          <a:lstStyle/>
+          <a:p>
+            <a:pPr>
+              <a:spcAft>
+                <a:spcPts val="400"/>
+              </a:spcAft>
+              <a:defRPr sz="1400">
+                <a:solidFill>
+                  <a:srgbClr val="F8FAFC"/>
+                </a:solidFill>
+              </a:defRPr>
+            </a:pPr>
+            <a:r>
+              <a:t>LiquidRound is the AI ECM / IB analyst squad — a chat-first workspace where</a:t>
+            </a:r>
+          </a:p>
+          <a:p>
+            <a:pPr>
+              <a:spcAft>
+                <a:spcPts val="400"/>
+              </a:spcAft>
+              <a:defRPr sz="1400">
+                <a:solidFill>
+                  <a:srgbClr val="F8FAFC"/>
+                </a:solidFill>
+              </a:defRPr>
+            </a:pPr>
+            <a:r>
+              <a:t>every question routes to the right specialist agent automatically.</a:t>
+            </a:r>
+          </a:p>
+          <a:p>
+            <a:pPr lvl="1">
+              <a:spcAft>
+                <a:spcPts val="400"/>
+              </a:spcAft>
+              <a:defRPr sz="1400">
+                <a:solidFill>
+                  <a:srgbClr val="F8FAFC"/>
+                </a:solidFill>
+              </a:defRPr>
+            </a:pPr>
+            <a:r>
+              <a:t>• Buy-side: Find acquisition targets, run diligence, score matches, and draft IC memos.</a:t>
+            </a:r>
+          </a:p>
+          <a:p>
+            <a:pPr lvl="1">
+              <a:spcAft>
+                <a:spcPts val="400"/>
+              </a:spcAft>
+              <a:defRPr sz="1400">
+                <a:solidFill>
+                  <a:srgbClr val="F8FAFC"/>
+                </a:solidFill>
+              </a:defRPr>
+            </a:pPr>
+            <a:r>
+              <a:t>• Sell-side: Prepare for sale (teasers / CIMs), identify buyers, and assess IPO readiness.</a:t>
+            </a:r>
+          </a:p>
+          <a:p>
+            <a:pPr lvl="1">
+              <a:spcAft>
+                <a:spcPts val="400"/>
+              </a:spcAft>
+              <a:defRPr sz="1400">
+                <a:solidFill>
+                  <a:srgbClr val="F8FAFC"/>
+                </a:solidFill>
+              </a:defRPr>
+            </a:pPr>
+            <a:r>
+              <a:t>• Public markets: Explore SEC 13F institutional holdings, fund AUM rankings, and activist filings.</a:t>
+            </a:r>
+          </a:p>
+          <a:p>
+            <a:pPr lvl="1">
+              <a:spcAft>
+                <a:spcPts val="400"/>
+              </a:spcAft>
+              <a:defRPr sz="1400">
+                <a:solidFill>
+                  <a:srgbClr val="F8FAFC"/>
+                </a:solidFill>
+              </a:defRPr>
+            </a:pPr>
+            <a:r>
+              <a:t>• BYOD: Upload your own pitch books, CIMs, and term sheets — agents read, cite, and draft from them.</a:t>
+            </a:r>
+          </a:p>
+          <a:p>
+            <a:pPr>
+              <a:spcAft>
+                <a:spcPts val="400"/>
+              </a:spcAft>
+              <a:defRPr sz="1400">
+                <a:solidFill>
+                  <a:srgbClr val="F8FAFC"/>
+                </a:solidFill>
+              </a:defRPr>
+            </a:pPr>
+            <a:r>
+              <a:t>The whole product answers one question: **"Who should we look at, what is it</a:t>
+            </a:r>
+          </a:p>
+          <a:p>
+            <a:pPr>
+              <a:spcAft>
+                <a:spcPts val="400"/>
+              </a:spcAft>
+              <a:defRPr sz="1400">
+                <a:solidFill>
+                  <a:srgbClr val="F8FAFC"/>
+                </a:solidFill>
+              </a:defRPr>
+            </a:pPr>
+            <a:r>
+              <a:t>worth, and what are the risks — ready for IC?"**</a:t>
+            </a:r>
+          </a:p>
+        </p:txBody>
+      </p:sp>
     </p:spTree>
   </p:cSld>
   <p:clrMapOvr>
@@ -5670,8 +5687,8 @@
         </p:nvSpPr>
         <p:spPr>
           <a:xfrm>
-            <a:off x="731520" y="365760"/>
-            <a:ext cx="10515600" cy="731520"/>
+            <a:off x="731520" y="274320"/>
+            <a:ext cx="10515600" cy="640080"/>
           </a:xfrm>
           <a:prstGeom prst="rect">
             <a:avLst/>
@@ -5685,28 +5702,52 @@
           <a:lstStyle/>
           <a:p>
             <a:pPr algn="l">
-              <a:defRPr sz="3200" b="1">
+              <a:defRPr sz="2800" b="1">
                 <a:solidFill>
                   <a:srgbClr val="F59E0B"/>
                 </a:solidFill>
               </a:defRPr>
             </a:pPr>
             <a:r>
-              <a:t>ECM Agent Squad</a:t>
-            </a:r>
-          </a:p>
-        </p:txBody>
-      </p:sp>
-      <p:sp>
-        <p:nvSpPr>
-          <p:cNvPr id="3" name="TextBox 2"/>
+              <a:t>Getting started</a:t>
+            </a:r>
+          </a:p>
+        </p:txBody>
+      </p:sp>
+      <p:pic>
+        <p:nvPicPr>
+          <p:cNvPr id="3" name="Picture 2" descr="01-landing.png"/>
+          <p:cNvPicPr>
+            <a:picLocks noChangeAspect="1"/>
+          </p:cNvPicPr>
+          <p:nvPr/>
+        </p:nvPicPr>
+        <p:blipFill>
+          <a:blip r:embed="rId2"/>
+          <a:stretch>
+            <a:fillRect/>
+          </a:stretch>
+        </p:blipFill>
+        <p:spPr>
+          <a:xfrm>
+            <a:off x="6217920" y="1005840"/>
+            <a:ext cx="5486400" cy="3429000"/>
+          </a:xfrm>
+          <a:prstGeom prst="rect">
+            <a:avLst/>
+          </a:prstGeom>
+        </p:spPr>
+      </p:pic>
+      <p:sp>
+        <p:nvSpPr>
+          <p:cNvPr id="4" name="TextBox 3"/>
           <p:cNvSpPr txBox="1"/>
           <p:nvPr/>
         </p:nvSpPr>
         <p:spPr>
           <a:xfrm>
-            <a:off x="731520" y="1280160"/>
-            <a:ext cx="10515600" cy="5029200"/>
+            <a:off x="731520" y="1005840"/>
+            <a:ext cx="5303520" cy="5303520"/>
           </a:xfrm>
           <a:prstGeom prst="rect">
             <a:avLst/>
@@ -5721,121 +5762,76 @@
           <a:p>
             <a:pPr>
               <a:spcAft>
-                <a:spcPts val="400"/>
-              </a:spcAft>
-              <a:defRPr sz="1400">
-                <a:solidFill>
-                  <a:srgbClr val="F8FAFC"/>
-                </a:solidFill>
-              </a:defRPr>
-            </a:pPr>
-            <a:r>
-              <a:t>LiquidRound includes 23 specialized AI agents organized into 6 categories:</a:t>
+                <a:spcPts val="300"/>
+              </a:spcAft>
+              <a:defRPr sz="1300">
+                <a:solidFill>
+                  <a:srgbClr val="F8FAFC"/>
+                </a:solidFill>
+              </a:defRPr>
+            </a:pPr>
+            <a:r>
+              <a:t>Open liquidround.ai and choose your side:</a:t>
             </a:r>
           </a:p>
           <a:p>
             <a:pPr lvl="1">
               <a:spcAft>
-                <a:spcPts val="400"/>
-              </a:spcAft>
-              <a:defRPr sz="1400">
-                <a:solidFill>
-                  <a:srgbClr val="F8FAFC"/>
-                </a:solidFill>
-              </a:defRPr>
-            </a:pPr>
-            <a:r>
-              <a:t>• Deal Sourcing &amp; Screening (4 agents) — Deal triage, target scanning, buyer scanning, seller intent analysis</a:t>
+                <a:spcPts val="300"/>
+              </a:spcAft>
+              <a:defRPr sz="1300">
+                <a:solidFill>
+                  <a:srgbClr val="F8FAFC"/>
+                </a:solidFill>
+              </a:defRPr>
+            </a:pPr>
+            <a:r>
+              <a:t>• Buyer-Led — the app defaults to sourcing, diligence, and valuation agents.</a:t>
             </a:r>
           </a:p>
           <a:p>
             <a:pPr lvl="1">
               <a:spcAft>
-                <a:spcPts val="400"/>
-              </a:spcAft>
-              <a:defRPr sz="1400">
-                <a:solidFill>
-                  <a:srgbClr val="F8FAFC"/>
-                </a:solidFill>
-              </a:defRPr>
-            </a:pPr>
-            <a:r>
-              <a:t>• Valuation &amp; Underwriting (6 agents) — Company profiling, DCF, comps, LTM normalization, multiples, synergy modelling</a:t>
-            </a:r>
-          </a:p>
-          <a:p>
-            <a:pPr lvl="1">
-              <a:spcAft>
-                <a:spcPts val="400"/>
-              </a:spcAft>
-              <a:defRPr sz="1400">
-                <a:solidFill>
-                  <a:srgbClr val="F8FAFC"/>
-                </a:solidFill>
-              </a:defRPr>
-            </a:pPr>
-            <a:r>
-              <a:t>• Due Diligence Stack (5 agents) — VDR audit, contract abstraction, legal review, operational review, ESG screening</a:t>
-            </a:r>
-          </a:p>
-          <a:p>
-            <a:pPr lvl="1">
-              <a:spcAft>
-                <a:spcPts val="400"/>
-              </a:spcAft>
-              <a:defRPr sz="1400">
-                <a:solidFill>
-                  <a:srgbClr val="F8FAFC"/>
-                </a:solidFill>
-              </a:defRPr>
-            </a:pPr>
-            <a:r>
-              <a:t>• Deal Execution &amp; Capital (5 agents) — IC memo writing, teaser design, bid strategy, IPO readiness, integration planning</a:t>
-            </a:r>
-          </a:p>
-          <a:p>
-            <a:pPr lvl="1">
-              <a:spcAft>
-                <a:spcPts val="400"/>
-              </a:spcAft>
-              <a:defRPr sz="1400">
-                <a:solidFill>
-                  <a:srgbClr val="F8FAFC"/>
-                </a:solidFill>
-              </a:defRPr>
-            </a:pPr>
-            <a:r>
-              <a:t>• Research &amp; Post-Deal (2 agents) — Research analyst, match scorer</a:t>
-            </a:r>
-          </a:p>
-          <a:p>
-            <a:pPr lvl="1">
-              <a:spcAft>
-                <a:spcPts val="400"/>
-              </a:spcAft>
-              <a:defRPr sz="1400">
-                <a:solidFill>
-                  <a:srgbClr val="F8FAFC"/>
-                </a:solidFill>
-              </a:defRPr>
-            </a:pPr>
-            <a:r>
-              <a:t>• Public Markets &amp; Hedge Funds (1 agent) — Hedge fund analyst with SEC 13F data</a:t>
-            </a:r>
-          </a:p>
-          <a:p>
-            <a:pPr>
-              <a:spcAft>
-                <a:spcPts val="400"/>
-              </a:spcAft>
-              <a:defRPr sz="1400">
-                <a:solidFill>
-                  <a:srgbClr val="F8FAFC"/>
-                </a:solidFill>
-              </a:defRPr>
-            </a:pPr>
-            <a:r>
-              <a:t>Each agent has its own system prompt and tool set. You can view and edit agent prompts in Instructions.</a:t>
+                <a:spcPts val="300"/>
+              </a:spcAft>
+              <a:defRPr sz="1300">
+                <a:solidFill>
+                  <a:srgbClr val="F8FAFC"/>
+                </a:solidFill>
+              </a:defRPr>
+            </a:pPr>
+            <a:r>
+              <a:t>• Seller-Led — the app defaults to positioning, teaser, and IPO readiness agents.</a:t>
+            </a:r>
+          </a:p>
+          <a:p>
+            <a:pPr>
+              <a:spcAft>
+                <a:spcPts val="300"/>
+              </a:spcAft>
+              <a:defRPr sz="1300">
+                <a:solidFill>
+                  <a:srgbClr val="F8FAFC"/>
+                </a:solidFill>
+              </a:defRPr>
+            </a:pPr>
+            <a:r>
+              <a:t>Sign in or register to save sessions, conversations, and pipelines. Guest users</a:t>
+            </a:r>
+          </a:p>
+          <a:p>
+            <a:pPr>
+              <a:spcAft>
+                <a:spcPts val="300"/>
+              </a:spcAft>
+              <a:defRPr sz="1300">
+                <a:solidFill>
+                  <a:srgbClr val="F8FAFC"/>
+                </a:solidFill>
+              </a:defRPr>
+            </a:pPr>
+            <a:r>
+              <a:t>can still use the full chat with in-memory sessions.</a:t>
             </a:r>
           </a:p>
         </p:txBody>
@@ -5874,8 +5870,8 @@
         </p:nvSpPr>
         <p:spPr>
           <a:xfrm>
-            <a:off x="731520" y="365760"/>
-            <a:ext cx="10515600" cy="731520"/>
+            <a:off x="731520" y="274320"/>
+            <a:ext cx="10515600" cy="640080"/>
           </a:xfrm>
           <a:prstGeom prst="rect">
             <a:avLst/>
@@ -5889,28 +5885,52 @@
           <a:lstStyle/>
           <a:p>
             <a:pPr algn="l">
-              <a:defRPr sz="3200" b="1">
+              <a:defRPr sz="2800" b="1">
                 <a:solidFill>
                   <a:srgbClr val="F59E0B"/>
                 </a:solidFill>
               </a:defRPr>
             </a:pPr>
             <a:r>
-              <a:t>Public Markets</a:t>
-            </a:r>
-          </a:p>
-        </p:txBody>
-      </p:sp>
-      <p:sp>
-        <p:nvSpPr>
-          <p:cNvPr id="3" name="TextBox 2"/>
+              <a:t>The platform — one system, every stage</a:t>
+            </a:r>
+          </a:p>
+        </p:txBody>
+      </p:sp>
+      <p:pic>
+        <p:nvPicPr>
+          <p:cNvPr id="3" name="Picture 2" descr="02-ecm-squad.png"/>
+          <p:cNvPicPr>
+            <a:picLocks noChangeAspect="1"/>
+          </p:cNvPicPr>
+          <p:nvPr/>
+        </p:nvPicPr>
+        <p:blipFill>
+          <a:blip r:embed="rId2"/>
+          <a:stretch>
+            <a:fillRect/>
+          </a:stretch>
+        </p:blipFill>
+        <p:spPr>
+          <a:xfrm>
+            <a:off x="6217920" y="1005840"/>
+            <a:ext cx="5486400" cy="3429000"/>
+          </a:xfrm>
+          <a:prstGeom prst="rect">
+            <a:avLst/>
+          </a:prstGeom>
+        </p:spPr>
+      </p:pic>
+      <p:sp>
+        <p:nvSpPr>
+          <p:cNvPr id="4" name="TextBox 3"/>
           <p:cNvSpPr txBox="1"/>
           <p:nvPr/>
         </p:nvSpPr>
         <p:spPr>
           <a:xfrm>
-            <a:off x="731520" y="1280160"/>
-            <a:ext cx="10515600" cy="5029200"/>
+            <a:off x="731520" y="1005840"/>
+            <a:ext cx="5303520" cy="5303520"/>
           </a:xfrm>
           <a:prstGeom prst="rect">
             <a:avLst/>
@@ -5925,115 +5945,106 @@
           <a:p>
             <a:pPr>
               <a:spcAft>
-                <a:spcPts val="400"/>
-              </a:spcAft>
-              <a:defRPr sz="1400">
-                <a:solidFill>
-                  <a:srgbClr val="F8FAFC"/>
-                </a:solidFill>
-              </a:defRPr>
-            </a:pPr>
-            <a:r>
-              <a:t>Access via the Public Markets section in the left navigation:</a:t>
-            </a:r>
-          </a:p>
-          <a:p>
-            <a:pPr>
-              <a:spcBef>
-                <a:spcPts val="1200"/>
-              </a:spcBef>
-              <a:spcAft>
-                <a:spcPts val="400"/>
-              </a:spcAft>
-              <a:defRPr sz="1800" b="1">
-                <a:solidFill>
-                  <a:srgbClr val="F59E0B"/>
-                </a:solidFill>
-              </a:defRPr>
-            </a:pPr>
-            <a:r>
-              <a:t>IPO Map</a:t>
-            </a:r>
-          </a:p>
-          <a:p>
-            <a:pPr>
-              <a:spcAft>
-                <a:spcPts val="400"/>
-              </a:spcAft>
-              <a:defRPr sz="1400">
-                <a:solidFill>
-                  <a:srgbClr val="F8FAFC"/>
-                </a:solidFill>
-              </a:defRPr>
-            </a:pPr>
-            <a:r>
-              <a:t>Interactive world map of recent and upcoming IPOs. Filter by geography and sector.</a:t>
-            </a:r>
-          </a:p>
-          <a:p>
-            <a:pPr>
-              <a:spcBef>
-                <a:spcPts val="1200"/>
-              </a:spcBef>
-              <a:spcAft>
-                <a:spcPts val="400"/>
-              </a:spcAft>
-              <a:defRPr sz="1800" b="1">
-                <a:solidFill>
-                  <a:srgbClr val="F59E0B"/>
-                </a:solidFill>
-              </a:defRPr>
-            </a:pPr>
-            <a:r>
-              <a:t>IPO Pipeline</a:t>
-            </a:r>
-          </a:p>
-          <a:p>
-            <a:pPr>
-              <a:spcAft>
-                <a:spcPts val="400"/>
-              </a:spcAft>
-              <a:defRPr sz="1400">
-                <a:solidFill>
-                  <a:srgbClr val="F8FAFC"/>
-                </a:solidFill>
-              </a:defRPr>
-            </a:pPr>
-            <a:r>
-              <a:t>Track the IPO pipeline with deal stages, expected pricing dates, and offering sizes.</a:t>
-            </a:r>
-          </a:p>
-          <a:p>
-            <a:pPr>
-              <a:spcBef>
-                <a:spcPts val="1200"/>
-              </a:spcBef>
-              <a:spcAft>
-                <a:spcPts val="400"/>
-              </a:spcAft>
-              <a:defRPr sz="1800" b="1">
-                <a:solidFill>
-                  <a:srgbClr val="F59E0B"/>
-                </a:solidFill>
-              </a:defRPr>
-            </a:pPr>
-            <a:r>
-              <a:t>Prospectus</a:t>
-            </a:r>
-          </a:p>
-          <a:p>
-            <a:pPr>
-              <a:spcAft>
-                <a:spcPts val="400"/>
-              </a:spcAft>
-              <a:defRPr sz="1400">
-                <a:solidFill>
-                  <a:srgbClr val="F8FAFC"/>
-                </a:solidFill>
-              </a:defRPr>
-            </a:pPr>
-            <a:r>
-              <a:t>Browse and analyze IPO prospectus documents.</a:t>
+                <a:spcPts val="300"/>
+              </a:spcAft>
+              <a:defRPr sz="1300">
+                <a:solidFill>
+                  <a:srgbClr val="F8FAFC"/>
+                </a:solidFill>
+              </a:defRPr>
+            </a:pPr>
+            <a:r>
+              <a:t>Your ECM / IB analyst squad spans 6 workflow categories:</a:t>
+            </a:r>
+          </a:p>
+          <a:p>
+            <a:pPr lvl="1">
+              <a:spcAft>
+                <a:spcPts val="300"/>
+              </a:spcAft>
+              <a:defRPr sz="1300">
+                <a:solidFill>
+                  <a:srgbClr val="F8FAFC"/>
+                </a:solidFill>
+              </a:defRPr>
+            </a:pPr>
+            <a:r>
+              <a:t>• Deal Sourcing &amp; Screening (4 agents) — target scanning, buyer scanning, deal triage, seller intent</a:t>
+            </a:r>
+          </a:p>
+          <a:p>
+            <a:pPr lvl="1">
+              <a:spcAft>
+                <a:spcPts val="300"/>
+              </a:spcAft>
+              <a:defRPr sz="1300">
+                <a:solidFill>
+                  <a:srgbClr val="F8FAFC"/>
+                </a:solidFill>
+              </a:defRPr>
+            </a:pPr>
+            <a:r>
+              <a:t>• Valuation &amp; Underwriting (6 agents) — company profiling, DCF, comps, LTM, multiples, synergy</a:t>
+            </a:r>
+          </a:p>
+          <a:p>
+            <a:pPr lvl="1">
+              <a:spcAft>
+                <a:spcPts val="300"/>
+              </a:spcAft>
+              <a:defRPr sz="1300">
+                <a:solidFill>
+                  <a:srgbClr val="F8FAFC"/>
+                </a:solidFill>
+              </a:defRPr>
+            </a:pPr>
+            <a:r>
+              <a:t>• Due Diligence Stack (5 agents) — VDR audit, contract abstraction, legal, operational, ESG</a:t>
+            </a:r>
+          </a:p>
+          <a:p>
+            <a:pPr lvl="1">
+              <a:spcAft>
+                <a:spcPts val="300"/>
+              </a:spcAft>
+              <a:defRPr sz="1300">
+                <a:solidFill>
+                  <a:srgbClr val="F8FAFC"/>
+                </a:solidFill>
+              </a:defRPr>
+            </a:pPr>
+            <a:r>
+              <a:t>• Deal Execution &amp; Capital (5 agents) — IC memo, teaser, bid strategy, IPO readiness, integration</a:t>
+            </a:r>
+          </a:p>
+          <a:p>
+            <a:pPr lvl="1">
+              <a:spcAft>
+                <a:spcPts val="300"/>
+              </a:spcAft>
+              <a:defRPr sz="1300">
+                <a:solidFill>
+                  <a:srgbClr val="F8FAFC"/>
+                </a:solidFill>
+              </a:defRPr>
+            </a:pPr>
+            <a:r>
+              <a:t>• Research &amp; Post-Deal (2 agents) — research analyst, match scorer</a:t>
+            </a:r>
+          </a:p>
+          <a:p>
+            <a:pPr lvl="1">
+              <a:spcAft>
+                <a:spcPts val="300"/>
+              </a:spcAft>
+              <a:defRPr sz="1300">
+                <a:solidFill>
+                  <a:srgbClr val="F8FAFC"/>
+                </a:solidFill>
+              </a:defRPr>
+            </a:pPr>
+            <a:r>
+              <a:t>• Public Markets &amp; Hedge Funds (1 agent) — SEC 13F holdings, fund AUM, activist filings</a:t>
             </a:r>
           </a:p>
         </p:txBody>
@@ -6072,8 +6083,8 @@
         </p:nvSpPr>
         <p:spPr>
           <a:xfrm>
-            <a:off x="731520" y="365760"/>
-            <a:ext cx="10515600" cy="731520"/>
+            <a:off x="731520" y="274320"/>
+            <a:ext cx="10515600" cy="640080"/>
           </a:xfrm>
           <a:prstGeom prst="rect">
             <a:avLst/>
@@ -6087,28 +6098,52 @@
           <a:lstStyle/>
           <a:p>
             <a:pPr algn="l">
-              <a:defRPr sz="3200" b="1">
+              <a:defRPr sz="2800" b="1">
                 <a:solidFill>
                   <a:srgbClr val="F59E0B"/>
                 </a:solidFill>
               </a:defRPr>
             </a:pPr>
             <a:r>
-              <a:t>Hedge Funds</a:t>
-            </a:r>
-          </a:p>
-        </p:txBody>
-      </p:sp>
-      <p:sp>
-        <p:nvSpPr>
-          <p:cNvPr id="3" name="TextBox 2"/>
+              <a:t>Sign in</a:t>
+            </a:r>
+          </a:p>
+        </p:txBody>
+      </p:sp>
+      <p:pic>
+        <p:nvPicPr>
+          <p:cNvPr id="3" name="Picture 2" descr="03-signin.png"/>
+          <p:cNvPicPr>
+            <a:picLocks noChangeAspect="1"/>
+          </p:cNvPicPr>
+          <p:nvPr/>
+        </p:nvPicPr>
+        <p:blipFill>
+          <a:blip r:embed="rId2"/>
+          <a:stretch>
+            <a:fillRect/>
+          </a:stretch>
+        </p:blipFill>
+        <p:spPr>
+          <a:xfrm>
+            <a:off x="6217920" y="1005840"/>
+            <a:ext cx="5486400" cy="3429000"/>
+          </a:xfrm>
+          <a:prstGeom prst="rect">
+            <a:avLst/>
+          </a:prstGeom>
+        </p:spPr>
+      </p:pic>
+      <p:sp>
+        <p:nvSpPr>
+          <p:cNvPr id="4" name="TextBox 3"/>
           <p:cNvSpPr txBox="1"/>
           <p:nvPr/>
         </p:nvSpPr>
         <p:spPr>
           <a:xfrm>
-            <a:off x="731520" y="1280160"/>
-            <a:ext cx="10515600" cy="5029200"/>
+            <a:off x="731520" y="1005840"/>
+            <a:ext cx="5303520" cy="5303520"/>
           </a:xfrm>
           <a:prstGeom prst="rect">
             <a:avLst/>
@@ -6123,295 +6158,31 @@
           <a:p>
             <a:pPr>
               <a:spcAft>
-                <a:spcPts val="400"/>
-              </a:spcAft>
-              <a:defRPr sz="1400">
-                <a:solidFill>
-                  <a:srgbClr val="F8FAFC"/>
-                </a:solidFill>
-              </a:defRPr>
-            </a:pPr>
-            <a:r>
-              <a:t>Access via the Hedge Funds section in the left navigation:</a:t>
-            </a:r>
-          </a:p>
-          <a:p>
-            <a:pPr>
-              <a:spcBef>
-                <a:spcPts val="1200"/>
-              </a:spcBef>
-              <a:spcAft>
-                <a:spcPts val="400"/>
-              </a:spcAft>
-              <a:defRPr sz="1800" b="1">
-                <a:solidFill>
-                  <a:srgbClr val="F59E0B"/>
-                </a:solidFill>
-              </a:defRPr>
-            </a:pPr>
-            <a:r>
-              <a:t>Fund Treemap</a:t>
-            </a:r>
-          </a:p>
-          <a:p>
-            <a:pPr>
-              <a:spcAft>
-                <a:spcPts val="400"/>
-              </a:spcAft>
-              <a:defRPr sz="1400">
-                <a:solidFill>
-                  <a:srgbClr val="F8FAFC"/>
-                </a:solidFill>
-              </a:defRPr>
-            </a:pPr>
-            <a:r>
-              <a:t>Interactive Plotly treemap at /app/hedgefunds showing SEC Form 13F institutional holdings. The visualization groups positions by fund manager, with cell size proportional to portfolio value.</a:t>
-            </a:r>
-          </a:p>
-          <a:p>
-            <a:pPr>
-              <a:spcAft>
-                <a:spcPts val="400"/>
-              </a:spcAft>
-              <a:defRPr sz="1400">
-                <a:solidFill>
-                  <a:srgbClr val="F8FAFC"/>
-                </a:solidFill>
-              </a:defRPr>
-            </a:pPr>
-            <a:r>
-              <a:t>Filter controls:</a:t>
-            </a:r>
-          </a:p>
-          <a:p>
-            <a:pPr lvl="1">
-              <a:spcAft>
-                <a:spcPts val="400"/>
-              </a:spcAft>
-              <a:defRPr sz="1400">
-                <a:solidFill>
-                  <a:srgbClr val="F8FAFC"/>
-                </a:solidFill>
-              </a:defRPr>
-            </a:pPr>
-            <a:r>
-              <a:t>• Fund — Search for a specific fund manager (e.g. "Bridgewater", "Vanguard")</a:t>
-            </a:r>
-          </a:p>
-          <a:p>
-            <a:pPr lvl="1">
-              <a:spcAft>
-                <a:spcPts val="400"/>
-              </a:spcAft>
-              <a:defRPr sz="1400">
-                <a:solidFill>
-                  <a:srgbClr val="F8FAFC"/>
-                </a:solidFill>
-              </a:defRPr>
-            </a:pPr>
-            <a:r>
-              <a:t>• Min Value ($) — Filter positions by minimum value ($1M, $10M, $100M, $1B)</a:t>
-            </a:r>
-          </a:p>
-          <a:p>
-            <a:pPr lvl="1">
-              <a:spcAft>
-                <a:spcPts val="400"/>
-              </a:spcAft>
-              <a:defRPr sz="1400">
-                <a:solidFill>
-                  <a:srgbClr val="F8FAFC"/>
-                </a:solidFill>
-              </a:defRPr>
-            </a:pPr>
-            <a:r>
-              <a:t>• Limit — Number of positions to display (200, 500, 1000)</a:t>
-            </a:r>
-          </a:p>
-          <a:p>
-            <a:pPr>
-              <a:spcAft>
-                <a:spcPts val="400"/>
-              </a:spcAft>
-              <a:defRPr sz="1400">
-                <a:solidFill>
-                  <a:srgbClr val="F8FAFC"/>
-                </a:solidFill>
-              </a:defRPr>
-            </a:pPr>
-            <a:r>
-              <a:t>Click Apply to refresh the treemap with your filters.</a:t>
-            </a:r>
-          </a:p>
-          <a:p>
-            <a:pPr>
-              <a:spcBef>
-                <a:spcPts val="1200"/>
-              </a:spcBef>
-              <a:spcAft>
-                <a:spcPts val="400"/>
-              </a:spcAft>
-              <a:defRPr sz="1800" b="1">
-                <a:solidFill>
-                  <a:srgbClr val="F59E0B"/>
-                </a:solidFill>
-              </a:defRPr>
-            </a:pPr>
-            <a:r>
-              <a:t>Chat Commands</a:t>
-            </a:r>
-          </a:p>
-          <a:p>
-            <a:pPr>
-              <a:spcAft>
-                <a:spcPts val="400"/>
-              </a:spcAft>
-              <a:defRPr sz="1400">
-                <a:solidFill>
-                  <a:srgbClr val="F8FAFC"/>
-                </a:solidFill>
-              </a:defRPr>
-            </a:pPr>
-            <a:r>
-              <a:t>Click these in the left nav or type the prefix in chat:</a:t>
-            </a:r>
-          </a:p>
-          <a:p>
-            <a:pPr lvl="1">
-              <a:spcAft>
-                <a:spcPts val="400"/>
-              </a:spcAft>
-              <a:defRPr sz="1400">
-                <a:solidFill>
-                  <a:srgbClr val="F8FAFC"/>
-                </a:solidFill>
-              </a:defRPr>
-            </a:pPr>
-            <a:r>
-              <a:t>• Top Holdings — hedgefunds: top funds by AUM — Shows the largest institutional investors ranked by total portfolio value</a:t>
-            </a:r>
-          </a:p>
-          <a:p>
-            <a:pPr lvl="1">
-              <a:spcAft>
-                <a:spcPts val="400"/>
-              </a:spcAft>
-              <a:defRPr sz="1400">
-                <a:solidFill>
-                  <a:srgbClr val="F8FAFC"/>
-                </a:solidFill>
-              </a:defRPr>
-            </a:pPr>
-            <a:r>
-              <a:t>• Popular Securities — hedgefunds: most popular securities across all funds — The most widely held stocks across all 13F filers</a:t>
-            </a:r>
-          </a:p>
-          <a:p>
-            <a:pPr lvl="1">
-              <a:spcAft>
-                <a:spcPts val="400"/>
-              </a:spcAft>
-              <a:defRPr sz="1400">
-                <a:solidFill>
-                  <a:srgbClr val="F8FAFC"/>
-                </a:solidFill>
-              </a:defRPr>
-            </a:pPr>
-            <a:r>
-              <a:t>• Activist Filings — hedgefunds: recent activist filings — Recent Schedule 13D/13G beneficial ownership filings (indicates activist stakes)</a:t>
-            </a:r>
-          </a:p>
-          <a:p>
-            <a:pPr>
-              <a:spcBef>
-                <a:spcPts val="1200"/>
-              </a:spcBef>
-              <a:spcAft>
-                <a:spcPts val="400"/>
-              </a:spcAft>
-              <a:defRPr sz="1800" b="1">
-                <a:solidFill>
-                  <a:srgbClr val="F59E0B"/>
-                </a:solidFill>
-              </a:defRPr>
-            </a:pPr>
-            <a:r>
-              <a:t>Data Source</a:t>
-            </a:r>
-          </a:p>
-          <a:p>
-            <a:pPr>
-              <a:spcAft>
-                <a:spcPts val="400"/>
-              </a:spcAft>
-              <a:defRPr sz="1400">
-                <a:solidFill>
-                  <a:srgbClr val="F8FAFC"/>
-                </a:solidFill>
-              </a:defRPr>
-            </a:pPr>
-            <a:r>
-              <a:t>All hedge fund data comes from SEC Form 13F filings — mandatory quarterly disclosures by institutional investment managers with over $100M in qualifying assets. Key points:</a:t>
-            </a:r>
-          </a:p>
-          <a:p>
-            <a:pPr lvl="1">
-              <a:spcAft>
-                <a:spcPts val="400"/>
-              </a:spcAft>
-              <a:defRPr sz="1400">
-                <a:solidFill>
-                  <a:srgbClr val="F8FAFC"/>
-                </a:solidFill>
-              </a:defRPr>
-            </a:pPr>
-            <a:r>
-              <a:t>• Data reflects the latest available quarter with a 45-day filing lag</a:t>
-            </a:r>
-          </a:p>
-          <a:p>
-            <a:pPr lvl="1">
-              <a:spcAft>
-                <a:spcPts val="400"/>
-              </a:spcAft>
-              <a:defRPr sz="1400">
-                <a:solidFill>
-                  <a:srgbClr val="F8FAFC"/>
-                </a:solidFill>
-              </a:defRPr>
-            </a:pPr>
-            <a:r>
-              <a:t>• Values are reported in thousands of dollars (the SEC standard)</a:t>
-            </a:r>
-          </a:p>
-          <a:p>
-            <a:pPr lvl="1">
-              <a:spcAft>
-                <a:spcPts val="400"/>
-              </a:spcAft>
-              <a:defRPr sz="1400">
-                <a:solidFill>
-                  <a:srgbClr val="F8FAFC"/>
-                </a:solidFill>
-              </a:defRPr>
-            </a:pPr>
-            <a:r>
-              <a:t>• Only long equity positions are included (no shorts, options, or fixed income)</a:t>
-            </a:r>
-          </a:p>
-          <a:p>
-            <a:pPr lvl="1">
-              <a:spcAft>
-                <a:spcPts val="400"/>
-              </a:spcAft>
-              <a:defRPr sz="1400">
-                <a:solidFill>
-                  <a:srgbClr val="F8FAFC"/>
-                </a:solidFill>
-              </a:defRPr>
-            </a:pPr>
-            <a:r>
-              <a:t>• Approximately 10,000+ fund managers and 7 million+ holdings in the database</a:t>
+                <a:spcPts val="300"/>
+              </a:spcAft>
+              <a:defRPr sz="1300">
+                <a:solidFill>
+                  <a:srgbClr val="F8FAFC"/>
+                </a:solidFill>
+              </a:defRPr>
+            </a:pPr>
+            <a:r>
+              <a:t>Email + password or Sign in with Google. Registration is free. Signed-in users</a:t>
+            </a:r>
+          </a:p>
+          <a:p>
+            <a:pPr>
+              <a:spcAft>
+                <a:spcPts val="300"/>
+              </a:spcAft>
+              <a:defRPr sz="1300">
+                <a:solidFill>
+                  <a:srgbClr val="F8FAFC"/>
+                </a:solidFill>
+              </a:defRPr>
+            </a:pPr>
+            <a:r>
+              <a:t>get persistent conversations, share links, and saved pipelines.</a:t>
             </a:r>
           </a:p>
         </p:txBody>
@@ -6450,8 +6221,8 @@
         </p:nvSpPr>
         <p:spPr>
           <a:xfrm>
-            <a:off x="731520" y="365760"/>
-            <a:ext cx="10515600" cy="731520"/>
+            <a:off x="731520" y="274320"/>
+            <a:ext cx="10515600" cy="640080"/>
           </a:xfrm>
           <a:prstGeom prst="rect">
             <a:avLst/>
@@ -6465,28 +6236,52 @@
           <a:lstStyle/>
           <a:p>
             <a:pPr algn="l">
-              <a:defRPr sz="3200" b="1">
+              <a:defRPr sz="2800" b="1">
                 <a:solidFill>
                   <a:srgbClr val="F59E0B"/>
                 </a:solidFill>
               </a:defRPr>
             </a:pPr>
             <a:r>
-              <a:t>Lead-Magnet Tools</a:t>
-            </a:r>
-          </a:p>
-        </p:txBody>
-      </p:sp>
-      <p:sp>
-        <p:nvSpPr>
-          <p:cNvPr id="3" name="TextBox 2"/>
+              <a:t>The chat interface — your primary workspace</a:t>
+            </a:r>
+          </a:p>
+        </p:txBody>
+      </p:sp>
+      <p:pic>
+        <p:nvPicPr>
+          <p:cNvPr id="3" name="Picture 2" descr="04-app-chat.png"/>
+          <p:cNvPicPr>
+            <a:picLocks noChangeAspect="1"/>
+          </p:cNvPicPr>
+          <p:nvPr/>
+        </p:nvPicPr>
+        <p:blipFill>
+          <a:blip r:embed="rId2"/>
+          <a:stretch>
+            <a:fillRect/>
+          </a:stretch>
+        </p:blipFill>
+        <p:spPr>
+          <a:xfrm>
+            <a:off x="6217920" y="1005840"/>
+            <a:ext cx="5486400" cy="3429000"/>
+          </a:xfrm>
+          <a:prstGeom prst="rect">
+            <a:avLst/>
+          </a:prstGeom>
+        </p:spPr>
+      </p:pic>
+      <p:sp>
+        <p:nvSpPr>
+          <p:cNvPr id="4" name="TextBox 3"/>
           <p:cNvSpPr txBox="1"/>
           <p:nvPr/>
         </p:nvSpPr>
         <p:spPr>
           <a:xfrm>
-            <a:off x="731520" y="1280160"/>
-            <a:ext cx="10515600" cy="5029200"/>
+            <a:off x="731520" y="1005840"/>
+            <a:ext cx="5303520" cy="5303520"/>
           </a:xfrm>
           <a:prstGeom prst="rect">
             <a:avLst/>
@@ -6501,130 +6296,517 @@
           <a:p>
             <a:pPr>
               <a:spcAft>
+                <a:spcPts val="300"/>
+              </a:spcAft>
+              <a:defRPr sz="1300">
+                <a:solidFill>
+                  <a:srgbClr val="F8FAFC"/>
+                </a:solidFill>
+              </a:defRPr>
+            </a:pPr>
+            <a:r>
+              <a:t>The screen has three panes that stay consistent everywhere:</a:t>
+            </a:r>
+          </a:p>
+          <a:p>
+            <a:pPr lvl="1">
+              <a:spcAft>
+                <a:spcPts val="300"/>
+              </a:spcAft>
+              <a:defRPr sz="1300">
+                <a:solidFill>
+                  <a:srgbClr val="F8FAFC"/>
+                </a:solidFill>
+              </a:defRPr>
+            </a:pPr>
+            <a:r>
+              <a:t>• Left — navigation: Sessions, Agents (6 categories), Tools, Public Markets, Hedge Funds, Workspace (10 pages), Training, Help.</a:t>
+            </a:r>
+          </a:p>
+          <a:p>
+            <a:pPr lvl="1">
+              <a:spcAft>
+                <a:spcPts val="300"/>
+              </a:spcAft>
+              <a:defRPr sz="1300">
+                <a:solidFill>
+                  <a:srgbClr val="F8FAFC"/>
+                </a:solidFill>
+              </a:defRPr>
+            </a:pPr>
+            <a:r>
+              <a:t>• Centre — the chat: welcome hero with example prompts, message thread, and input bar.</a:t>
+            </a:r>
+          </a:p>
+          <a:p>
+            <a:pPr lvl="1">
+              <a:spcAft>
+                <a:spcPts val="300"/>
+              </a:spcAft>
+              <a:defRPr sz="1300">
+                <a:solidFill>
+                  <a:srgbClr val="F8FAFC"/>
+                </a:solidFill>
+              </a:defRPr>
+            </a:pPr>
+            <a:r>
+              <a:t>• Right — the artifact canvas: News, Artifact tabs for agent-produced tables, charts, citations, and PDF previews.</a:t>
+            </a:r>
+          </a:p>
+          <a:p>
+            <a:pPr>
+              <a:spcBef>
+                <a:spcPts val="1000"/>
+              </a:spcBef>
+              <a:spcAft>
                 <a:spcPts val="400"/>
               </a:spcAft>
-              <a:defRPr sz="1400">
-                <a:solidFill>
-                  <a:srgbClr val="F8FAFC"/>
-                </a:solidFill>
-              </a:defRPr>
-            </a:pPr>
-            <a:r>
-              <a:t>Three free tools are available without sign-in, accessible from the Tools section:</a:t>
+              <a:defRPr sz="1600" b="1">
+                <a:solidFill>
+                  <a:srgbClr val="F59E0B"/>
+                </a:solidFill>
+              </a:defRPr>
+            </a:pPr>
+            <a:r>
+              <a:t>Ask a question</a:t>
+            </a:r>
+          </a:p>
+          <a:p>
+            <a:pPr>
+              <a:spcAft>
+                <a:spcPts val="300"/>
+              </a:spcAft>
+              <a:defRPr sz="1300">
+                <a:solidFill>
+                  <a:srgbClr val="F8FAFC"/>
+                </a:solidFill>
+              </a:defRPr>
+            </a:pPr>
+            <a:r>
+              <a:t>Type a natural-language question — *"Find founder-owned vet clinics in the Baltics</a:t>
+            </a:r>
+          </a:p>
+          <a:p>
+            <a:pPr>
+              <a:spcAft>
+                <a:spcPts val="300"/>
+              </a:spcAft>
+              <a:defRPr sz="1300">
+                <a:solidFill>
+                  <a:srgbClr val="F8FAFC"/>
+                </a:solidFill>
+              </a:defRPr>
+            </a:pPr>
+            <a:r>
+              <a:t>with EUR 4M+ EBITDA"* — and the auto-router picks the best agent.</a:t>
             </a:r>
           </a:p>
           <a:p>
             <a:pPr>
               <a:spcBef>
-                <a:spcPts val="1200"/>
+                <a:spcPts val="1000"/>
               </a:spcBef>
               <a:spcAft>
                 <a:spcPts val="400"/>
               </a:spcAft>
-              <a:defRPr sz="1800" b="1">
+              <a:defRPr sz="1600" b="1">
                 <a:solidFill>
                   <a:srgbClr val="F59E0B"/>
                 </a:solidFill>
               </a:defRPr>
             </a:pPr>
             <a:r>
-              <a:t>Market Comps</a:t>
-            </a:r>
-          </a:p>
-          <a:p>
-            <a:pPr>
-              <a:spcAft>
-                <a:spcPts val="400"/>
-              </a:spcAft>
-              <a:defRPr sz="1400">
-                <a:solidFill>
-                  <a:srgbClr val="F8FAFC"/>
-                </a:solidFill>
-              </a:defRPr>
-            </a:pPr>
-            <a:r>
-              <a:t>Enter a company URL to get sector M&amp;A benchmarks — EV/Revenue and EV/EBITDA multiples compared to sector averages.</a:t>
-            </a:r>
-          </a:p>
-          <a:p>
-            <a:pPr>
-              <a:spcBef>
-                <a:spcPts val="1200"/>
-              </a:spcBef>
-              <a:spcAft>
-                <a:spcPts val="400"/>
-              </a:spcAft>
-              <a:defRPr sz="1800" b="1">
-                <a:solidFill>
-                  <a:srgbClr val="F59E0B"/>
-                </a:solidFill>
-              </a:defRPr>
-            </a:pPr>
-            <a:r>
-              <a:t>Find Buyers</a:t>
-            </a:r>
-          </a:p>
-          <a:p>
-            <a:pPr>
-              <a:spcAft>
-                <a:spcPts val="400"/>
-              </a:spcAft>
-              <a:defRPr sz="1400">
-                <a:solidFill>
-                  <a:srgbClr val="F8FAFC"/>
-                </a:solidFill>
-              </a:defRPr>
-            </a:pPr>
-            <a:r>
-              <a:t>Enter a company URL to identify potential strategic and financial buyers with match scoring.</a:t>
-            </a:r>
-          </a:p>
-          <a:p>
-            <a:pPr>
-              <a:spcBef>
-                <a:spcPts val="1200"/>
-              </a:spcBef>
-              <a:spcAft>
-                <a:spcPts val="400"/>
-              </a:spcAft>
-              <a:defRPr sz="1800" b="1">
-                <a:solidFill>
-                  <a:srgbClr val="F59E0B"/>
-                </a:solidFill>
-              </a:defRPr>
-            </a:pPr>
-            <a:r>
-              <a:t>Valuation</a:t>
-            </a:r>
-          </a:p>
-          <a:p>
-            <a:pPr>
-              <a:spcAft>
-                <a:spcPts val="400"/>
-              </a:spcAft>
-              <a:defRPr sz="1400">
-                <a:solidFill>
-                  <a:srgbClr val="F8FAFC"/>
-                </a:solidFill>
-              </a:defRPr>
-            </a:pPr>
-            <a:r>
-              <a:t>Enter a company URL and basic financials to get an indicative valuation range based on sector benchmarks.</a:t>
-            </a:r>
-          </a:p>
-          <a:p>
-            <a:pPr>
-              <a:spcAft>
-                <a:spcPts val="400"/>
-              </a:spcAft>
-              <a:defRPr sz="1400">
-                <a:solidFill>
-                  <a:srgbClr val="F8FAFC"/>
-                </a:solidFill>
-              </a:defRPr>
-            </a:pPr>
-            <a:r>
-              <a:t>All three tools work by scraping the company website, identifying the sector, and applying relevant multiples and buyer databases.</a:t>
+              <a:t>Try a shortcut</a:t>
+            </a:r>
+          </a:p>
+          <a:p>
+            <a:pPr>
+              <a:spcAft>
+                <a:spcPts val="300"/>
+              </a:spcAft>
+              <a:defRPr sz="1300">
+                <a:solidFill>
+                  <a:srgbClr val="F8FAFC"/>
+                </a:solidFill>
+              </a:defRPr>
+            </a:pPr>
+            <a:r>
+              <a:t>Use a prefix command to route directly to a specific agent:</a:t>
+            </a:r>
+          </a:p>
+          <a:p>
+            <a:pPr>
+              <a:spcAft>
+                <a:spcPts val="300"/>
+              </a:spcAft>
+              <a:defRPr sz="1300">
+                <a:solidFill>
+                  <a:srgbClr val="F8FAFC"/>
+                </a:solidFill>
+              </a:defRPr>
+            </a:pPr>
+            <a:r>
+              <a:t>| Prefix | Agent | What it does |</a:t>
+            </a:r>
+          </a:p>
+          <a:p>
+            <a:pPr>
+              <a:spcAft>
+                <a:spcPts val="300"/>
+              </a:spcAft>
+              <a:defRPr sz="1300">
+                <a:solidFill>
+                  <a:srgbClr val="F8FAFC"/>
+                </a:solidFill>
+              </a:defRPr>
+            </a:pPr>
+            <a:r>
+              <a:t>|--------|-------|-------------|</a:t>
+            </a:r>
+          </a:p>
+          <a:p>
+            <a:pPr>
+              <a:spcAft>
+                <a:spcPts val="300"/>
+              </a:spcAft>
+              <a:defRPr sz="1300">
+                <a:solidFill>
+                  <a:srgbClr val="F8FAFC"/>
+                </a:solidFill>
+              </a:defRPr>
+            </a:pPr>
+            <a:r>
+              <a:t>| profile: | Company Profiler | Look up a company by ticker |</a:t>
+            </a:r>
+          </a:p>
+          <a:p>
+            <a:pPr>
+              <a:spcAft>
+                <a:spcPts val="300"/>
+              </a:spcAft>
+              <a:defRPr sz="1300">
+                <a:solidFill>
+                  <a:srgbClr val="F8FAFC"/>
+                </a:solidFill>
+              </a:defRPr>
+            </a:pPr>
+            <a:r>
+              <a:t>| scan: | Target Scanner | Find acquisition targets |</a:t>
+            </a:r>
+          </a:p>
+          <a:p>
+            <a:pPr>
+              <a:spcAft>
+                <a:spcPts val="300"/>
+              </a:spcAft>
+              <a:defRPr sz="1300">
+                <a:solidFill>
+                  <a:srgbClr val="F8FAFC"/>
+                </a:solidFill>
+              </a:defRPr>
+            </a:pPr>
+            <a:r>
+              <a:t>| buyers: | Buyer Scanner | Identify strategic/financial buyers |</a:t>
+            </a:r>
+          </a:p>
+          <a:p>
+            <a:pPr>
+              <a:spcAft>
+                <a:spcPts val="300"/>
+              </a:spcAft>
+              <a:defRPr sz="1300">
+                <a:solidFill>
+                  <a:srgbClr val="F8FAFC"/>
+                </a:solidFill>
+              </a:defRPr>
+            </a:pPr>
+            <a:r>
+              <a:t>| triage: | Deal Triage | Quick deal screening |</a:t>
+            </a:r>
+          </a:p>
+          <a:p>
+            <a:pPr>
+              <a:spcAft>
+                <a:spcPts val="300"/>
+              </a:spcAft>
+              <a:defRPr sz="1300">
+                <a:solidFill>
+                  <a:srgbClr val="F8FAFC"/>
+                </a:solidFill>
+              </a:defRPr>
+            </a:pPr>
+            <a:r>
+              <a:t>| intent: | Seller Intent | Analyze seller motivation |</a:t>
+            </a:r>
+          </a:p>
+          <a:p>
+            <a:pPr>
+              <a:spcAft>
+                <a:spcPts val="300"/>
+              </a:spcAft>
+              <a:defRPr sz="1300">
+                <a:solidFill>
+                  <a:srgbClr val="F8FAFC"/>
+                </a:solidFill>
+              </a:defRPr>
+            </a:pPr>
+            <a:r>
+              <a:t>| dcf: | DCF Valuer | Discounted cash flow model |</a:t>
+            </a:r>
+          </a:p>
+          <a:p>
+            <a:pPr>
+              <a:spcAft>
+                <a:spcPts val="300"/>
+              </a:spcAft>
+              <a:defRPr sz="1300">
+                <a:solidFill>
+                  <a:srgbClr val="F8FAFC"/>
+                </a:solidFill>
+              </a:defRPr>
+            </a:pPr>
+            <a:r>
+              <a:t>| multi: | Multiples Valuer | EV/Revenue, EV/EBITDA comps |</a:t>
+            </a:r>
+          </a:p>
+          <a:p>
+            <a:pPr>
+              <a:spcAft>
+                <a:spcPts val="300"/>
+              </a:spcAft>
+              <a:defRPr sz="1300">
+                <a:solidFill>
+                  <a:srgbClr val="F8FAFC"/>
+                </a:solidFill>
+              </a:defRPr>
+            </a:pPr>
+            <a:r>
+              <a:t>| comps: | Comps Finder | Comparable transactions |</a:t>
+            </a:r>
+          </a:p>
+          <a:p>
+            <a:pPr>
+              <a:spcAft>
+                <a:spcPts val="300"/>
+              </a:spcAft>
+              <a:defRPr sz="1300">
+                <a:solidFill>
+                  <a:srgbClr val="F8FAFC"/>
+                </a:solidFill>
+              </a:defRPr>
+            </a:pPr>
+            <a:r>
+              <a:t>| ltm: | LTM Normalizer | Normalize trailing-twelve-month P&amp;L |</a:t>
+            </a:r>
+          </a:p>
+          <a:p>
+            <a:pPr>
+              <a:spcAft>
+                <a:spcPts val="300"/>
+              </a:spcAft>
+              <a:defRPr sz="1300">
+                <a:solidFill>
+                  <a:srgbClr val="F8FAFC"/>
+                </a:solidFill>
+              </a:defRPr>
+            </a:pPr>
+            <a:r>
+              <a:t>| synergy: | Synergy Analyst | Revenue and cost synergy modelling |</a:t>
+            </a:r>
+          </a:p>
+          <a:p>
+            <a:pPr>
+              <a:spcAft>
+                <a:spcPts val="300"/>
+              </a:spcAft>
+              <a:defRPr sz="1300">
+                <a:solidFill>
+                  <a:srgbClr val="F8FAFC"/>
+                </a:solidFill>
+              </a:defRPr>
+            </a:pPr>
+            <a:r>
+              <a:t>| score | Match Scorer | 7-dimension buyer-target scoring |</a:t>
+            </a:r>
+          </a:p>
+          <a:p>
+            <a:pPr>
+              <a:spcAft>
+                <a:spcPts val="300"/>
+              </a:spcAft>
+              <a:defRPr sz="1300">
+                <a:solidFill>
+                  <a:srgbClr val="F8FAFC"/>
+                </a:solidFill>
+              </a:defRPr>
+            </a:pPr>
+            <a:r>
+              <a:t>| vdr: | VDR Auditor | Audit data room completeness |</a:t>
+            </a:r>
+          </a:p>
+          <a:p>
+            <a:pPr>
+              <a:spcAft>
+                <a:spcPts val="300"/>
+              </a:spcAft>
+              <a:defRPr sz="1300">
+                <a:solidFill>
+                  <a:srgbClr val="F8FAFC"/>
+                </a:solidFill>
+              </a:defRPr>
+            </a:pPr>
+            <a:r>
+              <a:t>| abstract: | Contract Abstractor | Extract key terms from contracts |</a:t>
+            </a:r>
+          </a:p>
+          <a:p>
+            <a:pPr>
+              <a:spcAft>
+                <a:spcPts val="300"/>
+              </a:spcAft>
+              <a:defRPr sz="1300">
+                <a:solidFill>
+                  <a:srgbClr val="F8FAFC"/>
+                </a:solidFill>
+              </a:defRPr>
+            </a:pPr>
+            <a:r>
+              <a:t>| legal: | Legal Reviewer | Open litigation and legal risk |</a:t>
+            </a:r>
+          </a:p>
+          <a:p>
+            <a:pPr>
+              <a:spcAft>
+                <a:spcPts val="300"/>
+              </a:spcAft>
+              <a:defRPr sz="1300">
+                <a:solidFill>
+                  <a:srgbClr val="F8FAFC"/>
+                </a:solidFill>
+              </a:defRPr>
+            </a:pPr>
+            <a:r>
+              <a:t>| ops: | Operational DD | Working capital and operations review |</a:t>
+            </a:r>
+          </a:p>
+          <a:p>
+            <a:pPr>
+              <a:spcAft>
+                <a:spcPts val="300"/>
+              </a:spcAft>
+              <a:defRPr sz="1300">
+                <a:solidFill>
+                  <a:srgbClr val="F8FAFC"/>
+                </a:solidFill>
+              </a:defRPr>
+            </a:pPr>
+            <a:r>
+              <a:t>| esg: | ESG Reviewer | Environmental, social, governance screening |</a:t>
+            </a:r>
+          </a:p>
+          <a:p>
+            <a:pPr>
+              <a:spcAft>
+                <a:spcPts val="300"/>
+              </a:spcAft>
+              <a:defRPr sz="1300">
+                <a:solidFill>
+                  <a:srgbClr val="F8FAFC"/>
+                </a:solidFill>
+              </a:defRPr>
+            </a:pPr>
+            <a:r>
+              <a:t>| memo: | IC Memo Writer | Draft an investment committee memo |</a:t>
+            </a:r>
+          </a:p>
+          <a:p>
+            <a:pPr>
+              <a:spcAft>
+                <a:spcPts val="300"/>
+              </a:spcAft>
+              <a:defRPr sz="1300">
+                <a:solidFill>
+                  <a:srgbClr val="F8FAFC"/>
+                </a:solidFill>
+              </a:defRPr>
+            </a:pPr>
+            <a:r>
+              <a:t>| teaser: | Teaser Designer | Blind teaser for sell-side |</a:t>
+            </a:r>
+          </a:p>
+          <a:p>
+            <a:pPr>
+              <a:spcAft>
+                <a:spcPts val="300"/>
+              </a:spcAft>
+              <a:defRPr sz="1300">
+                <a:solidFill>
+                  <a:srgbClr val="F8FAFC"/>
+                </a:solidFill>
+              </a:defRPr>
+            </a:pPr>
+            <a:r>
+              <a:t>| bid: | Bid Strategist | Cash/stock mix and offer structuring |</a:t>
+            </a:r>
+          </a:p>
+          <a:p>
+            <a:pPr>
+              <a:spcAft>
+                <a:spcPts val="300"/>
+              </a:spcAft>
+              <a:defRPr sz="1300">
+                <a:solidFill>
+                  <a:srgbClr val="F8FAFC"/>
+                </a:solidFill>
+              </a:defRPr>
+            </a:pPr>
+            <a:r>
+              <a:t>| ipo: | IPO Readiness | Assess public offering readiness |</a:t>
+            </a:r>
+          </a:p>
+          <a:p>
+            <a:pPr>
+              <a:spcAft>
+                <a:spcPts val="300"/>
+              </a:spcAft>
+              <a:defRPr sz="1300">
+                <a:solidFill>
+                  <a:srgbClr val="F8FAFC"/>
+                </a:solidFill>
+              </a:defRPr>
+            </a:pPr>
+            <a:r>
+              <a:t>| integrate: | Integration Planner | Post-merger 100-day plan |</a:t>
+            </a:r>
+          </a:p>
+          <a:p>
+            <a:pPr>
+              <a:spcAft>
+                <a:spcPts val="300"/>
+              </a:spcAft>
+              <a:defRPr sz="1300">
+                <a:solidFill>
+                  <a:srgbClr val="F8FAFC"/>
+                </a:solidFill>
+              </a:defRPr>
+            </a:pPr>
+            <a:r>
+              <a:t>| research: | Research Analyst | Deep web + semantic research |</a:t>
+            </a:r>
+          </a:p>
+          <a:p>
+            <a:pPr>
+              <a:spcAft>
+                <a:spcPts val="300"/>
+              </a:spcAft>
+              <a:defRPr sz="1300">
+                <a:solidFill>
+                  <a:srgbClr val="F8FAFC"/>
+                </a:solidFill>
+              </a:defRPr>
+            </a:pPr>
+            <a:r>
+              <a:t>| hedgefunds: | Hedge Fund Analyst | SEC 13F holdings, fund AUM, activist filings |</a:t>
             </a:r>
           </a:p>
         </p:txBody>
@@ -6663,8 +6845,8 @@
         </p:nvSpPr>
         <p:spPr>
           <a:xfrm>
-            <a:off x="731520" y="365760"/>
-            <a:ext cx="10515600" cy="731520"/>
+            <a:off x="731520" y="274320"/>
+            <a:ext cx="10515600" cy="640080"/>
           </a:xfrm>
           <a:prstGeom prst="rect">
             <a:avLst/>
@@ -6678,28 +6860,52 @@
           <a:lstStyle/>
           <a:p>
             <a:pPr algn="l">
-              <a:defRPr sz="3200" b="1">
+              <a:defRPr sz="2800" b="1">
                 <a:solidFill>
                   <a:srgbClr val="F59E0B"/>
                 </a:solidFill>
               </a:defRPr>
             </a:pPr>
             <a:r>
-              <a:t>Workspace Pages</a:t>
-            </a:r>
-          </a:p>
-        </p:txBody>
-      </p:sp>
-      <p:sp>
-        <p:nvSpPr>
-          <p:cNvPr id="3" name="TextBox 2"/>
+              <a:t>Agent browser — 23 specialists at a glance</a:t>
+            </a:r>
+          </a:p>
+        </p:txBody>
+      </p:sp>
+      <p:pic>
+        <p:nvPicPr>
+          <p:cNvPr id="3" name="Picture 2" descr="05-agents-expanded.png"/>
+          <p:cNvPicPr>
+            <a:picLocks noChangeAspect="1"/>
+          </p:cNvPicPr>
+          <p:nvPr/>
+        </p:nvPicPr>
+        <p:blipFill>
+          <a:blip r:embed="rId2"/>
+          <a:stretch>
+            <a:fillRect/>
+          </a:stretch>
+        </p:blipFill>
+        <p:spPr>
+          <a:xfrm>
+            <a:off x="6217920" y="1005840"/>
+            <a:ext cx="5486400" cy="3429000"/>
+          </a:xfrm>
+          <a:prstGeom prst="rect">
+            <a:avLst/>
+          </a:prstGeom>
+        </p:spPr>
+      </p:pic>
+      <p:sp>
+        <p:nvSpPr>
+          <p:cNvPr id="4" name="TextBox 3"/>
           <p:cNvSpPr txBox="1"/>
           <p:nvPr/>
         </p:nvSpPr>
         <p:spPr>
           <a:xfrm>
-            <a:off x="731520" y="1280160"/>
-            <a:ext cx="10515600" cy="5029200"/>
+            <a:off x="731520" y="1005840"/>
+            <a:ext cx="5303520" cy="5303520"/>
           </a:xfrm>
           <a:prstGeom prst="rect">
             <a:avLst/>
@@ -6713,332 +6919,77 @@
           <a:lstStyle/>
           <a:p>
             <a:pPr>
-              <a:spcBef>
-                <a:spcPts val="1200"/>
-              </a:spcBef>
-              <a:spcAft>
-                <a:spcPts val="400"/>
-              </a:spcAft>
-              <a:defRPr sz="1800" b="1">
-                <a:solidFill>
-                  <a:srgbClr val="F59E0B"/>
-                </a:solidFill>
-              </a:defRPr>
-            </a:pPr>
-            <a:r>
-              <a:t>Companies</a:t>
-            </a:r>
-          </a:p>
-          <a:p>
-            <a:pPr>
-              <a:spcAft>
-                <a:spcPts val="400"/>
-              </a:spcAft>
-              <a:defRPr sz="1400">
-                <a:solidFill>
-                  <a:srgbClr val="F8FAFC"/>
-                </a:solidFill>
-              </a:defRPr>
-            </a:pPr>
-            <a:r>
-              <a:t>Search the company database by name, sector, or geography. Click a company to see its full profile with financials, description, and deal brief.</a:t>
-            </a:r>
-          </a:p>
-          <a:p>
-            <a:pPr>
-              <a:spcBef>
-                <a:spcPts val="1200"/>
-              </a:spcBef>
-              <a:spcAft>
-                <a:spcPts val="400"/>
-              </a:spcAft>
-              <a:defRPr sz="1800" b="1">
-                <a:solidFill>
-                  <a:srgbClr val="F59E0B"/>
-                </a:solidFill>
-              </a:defRPr>
-            </a:pPr>
-            <a:r>
-              <a:t>Pipelines</a:t>
-            </a:r>
-          </a:p>
-          <a:p>
-            <a:pPr>
-              <a:spcAft>
-                <a:spcPts val="400"/>
-              </a:spcAft>
-              <a:defRPr sz="1400">
-                <a:solidFill>
-                  <a:srgbClr val="F8FAFC"/>
-                </a:solidFill>
-              </a:defRPr>
-            </a:pPr>
-            <a:r>
-              <a:t>Track your deal pipeline — add targets or buyers, set deal stages, and monitor progress.</a:t>
-            </a:r>
-          </a:p>
-          <a:p>
-            <a:pPr>
-              <a:spcBef>
-                <a:spcPts val="1200"/>
-              </a:spcBef>
-              <a:spcAft>
-                <a:spcPts val="400"/>
-              </a:spcAft>
-              <a:defRPr sz="1800" b="1">
-                <a:solidFill>
-                  <a:srgbClr val="F59E0B"/>
-                </a:solidFill>
-              </a:defRPr>
-            </a:pPr>
-            <a:r>
-              <a:t>Daily Deals</a:t>
-            </a:r>
-          </a:p>
-          <a:p>
-            <a:pPr>
-              <a:spcAft>
-                <a:spcPts val="400"/>
-              </a:spcAft>
-              <a:defRPr sz="1400">
-                <a:solidFill>
-                  <a:srgbClr val="F8FAFC"/>
-                </a:solidFill>
-              </a:defRPr>
-            </a:pPr>
-            <a:r>
-              <a:t>AI-curated daily digest of M&amp;A-relevant companies with thesis analysis and sector comps.</a:t>
-            </a:r>
-          </a:p>
-          <a:p>
-            <a:pPr>
-              <a:spcBef>
-                <a:spcPts val="1200"/>
-              </a:spcBef>
-              <a:spcAft>
-                <a:spcPts val="400"/>
-              </a:spcAft>
-              <a:defRPr sz="1800" b="1">
-                <a:solidFill>
-                  <a:srgbClr val="F59E0B"/>
-                </a:solidFill>
-              </a:defRPr>
-            </a:pPr>
-            <a:r>
-              <a:t>Valuation</a:t>
-            </a:r>
-          </a:p>
-          <a:p>
-            <a:pPr>
-              <a:spcAft>
-                <a:spcPts val="400"/>
-              </a:spcAft>
-              <a:defRPr sz="1400">
-                <a:solidFill>
-                  <a:srgbClr val="F8FAFC"/>
-                </a:solidFill>
-              </a:defRPr>
-            </a:pPr>
-            <a:r>
-              <a:t>Interactive valuation simulator with 4 methods: EV/Revenue multiples, EV/EBITDA multiples, DCF (WACC + equity bridge), and combined view.</a:t>
-            </a:r>
-          </a:p>
-          <a:p>
-            <a:pPr>
-              <a:spcBef>
-                <a:spcPts val="1200"/>
-              </a:spcBef>
-              <a:spcAft>
-                <a:spcPts val="400"/>
-              </a:spcAft>
-              <a:defRPr sz="1800" b="1">
-                <a:solidFill>
-                  <a:srgbClr val="F59E0B"/>
-                </a:solidFill>
-              </a:defRPr>
-            </a:pPr>
-            <a:r>
-              <a:t>Analytics</a:t>
-            </a:r>
-          </a:p>
-          <a:p>
-            <a:pPr>
-              <a:spcAft>
-                <a:spcPts val="400"/>
-              </a:spcAft>
-              <a:defRPr sz="1400">
-                <a:solidFill>
-                  <a:srgbClr val="F8FAFC"/>
-                </a:solidFill>
-              </a:defRPr>
-            </a:pPr>
-            <a:r>
-              <a:t>Text-to-SQL analytics — ask questions in plain English and get charts + tables from the database.</a:t>
-            </a:r>
-          </a:p>
-          <a:p>
-            <a:pPr>
-              <a:spcBef>
-                <a:spcPts val="1200"/>
-              </a:spcBef>
-              <a:spcAft>
-                <a:spcPts val="400"/>
-              </a:spcAft>
-              <a:defRPr sz="1800" b="1">
-                <a:solidFill>
-                  <a:srgbClr val="F59E0B"/>
-                </a:solidFill>
-              </a:defRPr>
-            </a:pPr>
-            <a:r>
-              <a:t>Data Room</a:t>
-            </a:r>
-          </a:p>
-          <a:p>
-            <a:pPr>
-              <a:spcAft>
-                <a:spcPts val="400"/>
-              </a:spcAft>
-              <a:defRPr sz="1400">
-                <a:solidFill>
-                  <a:srgbClr val="F8FAFC"/>
-                </a:solidFill>
-              </a:defRPr>
-            </a:pPr>
-            <a:r>
-              <a:t>Upload and manage deal documents organized by company. Supports PDF, DOCX, XLSX, PPTX, CSV, and image files.</a:t>
-            </a:r>
-          </a:p>
-          <a:p>
-            <a:pPr>
-              <a:spcBef>
-                <a:spcPts val="1200"/>
-              </a:spcBef>
-              <a:spcAft>
-                <a:spcPts val="400"/>
-              </a:spcAft>
-              <a:defRPr sz="1800" b="1">
-                <a:solidFill>
-                  <a:srgbClr val="F59E0B"/>
-                </a:solidFill>
-              </a:defRPr>
-            </a:pPr>
-            <a:r>
-              <a:t>Documents</a:t>
-            </a:r>
-          </a:p>
-          <a:p>
-            <a:pPr>
-              <a:spcAft>
-                <a:spcPts val="400"/>
-              </a:spcAft>
-              <a:defRPr sz="1400">
-                <a:solidFill>
-                  <a:srgbClr val="F8FAFC"/>
-                </a:solidFill>
-              </a:defRPr>
-            </a:pPr>
-            <a:r>
-              <a:t>Browse and view uploaded documents. Extract key terms or score documents against buyer criteria.</a:t>
-            </a:r>
-          </a:p>
-          <a:p>
-            <a:pPr>
-              <a:spcBef>
-                <a:spcPts val="1200"/>
-              </a:spcBef>
-              <a:spcAft>
-                <a:spcPts val="400"/>
-              </a:spcAft>
-              <a:defRPr sz="1800" b="1">
-                <a:solidFill>
-                  <a:srgbClr val="F59E0B"/>
-                </a:solidFill>
-              </a:defRPr>
-            </a:pPr>
-            <a:r>
-              <a:t>Deal History</a:t>
-            </a:r>
-          </a:p>
-          <a:p>
-            <a:pPr>
-              <a:spcAft>
-                <a:spcPts val="400"/>
-              </a:spcAft>
-              <a:defRPr sz="1400">
-                <a:solidFill>
-                  <a:srgbClr val="F8FAFC"/>
-                </a:solidFill>
-              </a:defRPr>
-            </a:pPr>
-            <a:r>
-              <a:t>View your workflow history with charts showing deal types, timeline, and status distribution.</a:t>
-            </a:r>
-          </a:p>
-          <a:p>
-            <a:pPr>
-              <a:spcBef>
-                <a:spcPts val="1200"/>
-              </a:spcBef>
-              <a:spcAft>
-                <a:spcPts val="400"/>
-              </a:spcAft>
-              <a:defRPr sz="1800" b="1">
-                <a:solidFill>
-                  <a:srgbClr val="F59E0B"/>
-                </a:solidFill>
-              </a:defRPr>
-            </a:pPr>
-            <a:r>
-              <a:t>Instructions</a:t>
-            </a:r>
-          </a:p>
-          <a:p>
-            <a:pPr>
-              <a:spcAft>
-                <a:spcPts val="400"/>
-              </a:spcAft>
-              <a:defRPr sz="1400">
-                <a:solidFill>
-                  <a:srgbClr val="F8FAFC"/>
-                </a:solidFill>
-              </a:defRPr>
-            </a:pPr>
-            <a:r>
-              <a:t>View and customize agent system prompts to tailor AI behavior to your firm's standards.</a:t>
-            </a:r>
-          </a:p>
-          <a:p>
-            <a:pPr>
-              <a:spcBef>
-                <a:spcPts val="1200"/>
-              </a:spcBef>
-              <a:spcAft>
-                <a:spcPts val="400"/>
-              </a:spcAft>
-              <a:defRPr sz="1800" b="1">
-                <a:solidFill>
-                  <a:srgbClr val="F59E0B"/>
-                </a:solidFill>
-              </a:defRPr>
-            </a:pPr>
-            <a:r>
-              <a:t>Help</a:t>
-            </a:r>
-          </a:p>
-          <a:p>
-            <a:pPr>
-              <a:spcAft>
-                <a:spcPts val="400"/>
-              </a:spcAft>
-              <a:defRPr sz="1400">
-                <a:solidFill>
-                  <a:srgbClr val="F8FAFC"/>
-                </a:solidFill>
-              </a:defRPr>
-            </a:pPr>
-            <a:r>
-              <a:t>In-app help and quick reference.</a:t>
+              <a:spcAft>
+                <a:spcPts val="300"/>
+              </a:spcAft>
+              <a:defRPr sz="1300">
+                <a:solidFill>
+                  <a:srgbClr val="F8FAFC"/>
+                </a:solidFill>
+              </a:defRPr>
+            </a:pPr>
+            <a:r>
+              <a:t>Click any agent category in the left nav to expand it. Each agent shows its</a:t>
+            </a:r>
+          </a:p>
+          <a:p>
+            <a:pPr>
+              <a:spcAft>
+                <a:spcPts val="300"/>
+              </a:spcAft>
+              <a:defRPr sz="1300">
+                <a:solidFill>
+                  <a:srgbClr val="F8FAFC"/>
+                </a:solidFill>
+              </a:defRPr>
+            </a:pPr>
+            <a:r>
+              <a:t>name and prefix shortcut. Click an agent to fill the chat input with a sample</a:t>
+            </a:r>
+          </a:p>
+          <a:p>
+            <a:pPr>
+              <a:spcAft>
+                <a:spcPts val="300"/>
+              </a:spcAft>
+              <a:defRPr sz="1300">
+                <a:solidFill>
+                  <a:srgbClr val="F8FAFC"/>
+                </a:solidFill>
+              </a:defRPr>
+            </a:pPr>
+            <a:r>
+              <a:t>question — the router picks up automatically.</a:t>
+            </a:r>
+          </a:p>
+          <a:p>
+            <a:pPr>
+              <a:spcAft>
+                <a:spcPts val="300"/>
+              </a:spcAft>
+              <a:defRPr sz="1300">
+                <a:solidFill>
+                  <a:srgbClr val="F8FAFC"/>
+                </a:solidFill>
+              </a:defRPr>
+            </a:pPr>
+            <a:r>
+              <a:t>Each agent has its own system prompt and tool set. View and customize prompts in</a:t>
+            </a:r>
+          </a:p>
+          <a:p>
+            <a:pPr>
+              <a:spcAft>
+                <a:spcPts val="300"/>
+              </a:spcAft>
+              <a:defRPr sz="1300">
+                <a:solidFill>
+                  <a:srgbClr val="F8FAFC"/>
+                </a:solidFill>
+              </a:defRPr>
+            </a:pPr>
+            <a:r>
+              <a:t>Help → Instructions.</a:t>
             </a:r>
           </a:p>
         </p:txBody>
@@ -7077,8 +7028,8 @@
         </p:nvSpPr>
         <p:spPr>
           <a:xfrm>
-            <a:off x="731520" y="365760"/>
-            <a:ext cx="10515600" cy="731520"/>
+            <a:off x="731520" y="274320"/>
+            <a:ext cx="10515600" cy="640080"/>
           </a:xfrm>
           <a:prstGeom prst="rect">
             <a:avLst/>
@@ -7092,28 +7043,52 @@
           <a:lstStyle/>
           <a:p>
             <a:pPr algn="l">
-              <a:defRPr sz="3200" b="1">
+              <a:defRPr sz="2800" b="1">
                 <a:solidFill>
                   <a:srgbClr val="F59E0B"/>
                 </a:solidFill>
               </a:defRPr>
             </a:pPr>
             <a:r>
-              <a:t>Exports</a:t>
-            </a:r>
-          </a:p>
-        </p:txBody>
-      </p:sp>
-      <p:sp>
-        <p:nvSpPr>
-          <p:cNvPr id="3" name="TextBox 2"/>
+              <a:t>Hedge Fund Treemap</a:t>
+            </a:r>
+          </a:p>
+        </p:txBody>
+      </p:sp>
+      <p:pic>
+        <p:nvPicPr>
+          <p:cNvPr id="3" name="Picture 2" descr="06-hedgefunds-treemap.png"/>
+          <p:cNvPicPr>
+            <a:picLocks noChangeAspect="1"/>
+          </p:cNvPicPr>
+          <p:nvPr/>
+        </p:nvPicPr>
+        <p:blipFill>
+          <a:blip r:embed="rId2"/>
+          <a:stretch>
+            <a:fillRect/>
+          </a:stretch>
+        </p:blipFill>
+        <p:spPr>
+          <a:xfrm>
+            <a:off x="6217920" y="1005840"/>
+            <a:ext cx="5486400" cy="3429000"/>
+          </a:xfrm>
+          <a:prstGeom prst="rect">
+            <a:avLst/>
+          </a:prstGeom>
+        </p:spPr>
+      </p:pic>
+      <p:sp>
+        <p:nvSpPr>
+          <p:cNvPr id="4" name="TextBox 3"/>
           <p:cNvSpPr txBox="1"/>
           <p:nvPr/>
         </p:nvSpPr>
         <p:spPr>
           <a:xfrm>
-            <a:off x="731520" y="1280160"/>
-            <a:ext cx="10515600" cy="5029200"/>
+            <a:off x="731520" y="1005840"/>
+            <a:ext cx="5303520" cy="5303520"/>
           </a:xfrm>
           <a:prstGeom prst="rect">
             <a:avLst/>
@@ -7127,101 +7102,278 @@
           <a:lstStyle/>
           <a:p>
             <a:pPr>
+              <a:spcAft>
+                <a:spcPts val="300"/>
+              </a:spcAft>
+              <a:defRPr sz="1300">
+                <a:solidFill>
+                  <a:srgbClr val="F8FAFC"/>
+                </a:solidFill>
+              </a:defRPr>
+            </a:pPr>
+            <a:r>
+              <a:t>Interactive Plotly treemap at Hedge Funds → Fund Treemap showing SEC Form 13F</a:t>
+            </a:r>
+          </a:p>
+          <a:p>
+            <a:pPr>
+              <a:spcAft>
+                <a:spcPts val="300"/>
+              </a:spcAft>
+              <a:defRPr sz="1300">
+                <a:solidFill>
+                  <a:srgbClr val="F8FAFC"/>
+                </a:solidFill>
+              </a:defRPr>
+            </a:pPr>
+            <a:r>
+              <a:t>institutional holdings. Cell size is proportional to portfolio value.</a:t>
+            </a:r>
+          </a:p>
+          <a:p>
+            <a:pPr>
+              <a:spcAft>
+                <a:spcPts val="300"/>
+              </a:spcAft>
+              <a:defRPr sz="1300">
+                <a:solidFill>
+                  <a:srgbClr val="F8FAFC"/>
+                </a:solidFill>
+              </a:defRPr>
+            </a:pPr>
+            <a:r>
+              <a:t>Filter controls:</a:t>
+            </a:r>
+          </a:p>
+          <a:p>
+            <a:pPr lvl="1">
+              <a:spcAft>
+                <a:spcPts val="300"/>
+              </a:spcAft>
+              <a:defRPr sz="1300">
+                <a:solidFill>
+                  <a:srgbClr val="F8FAFC"/>
+                </a:solidFill>
+              </a:defRPr>
+            </a:pPr>
+            <a:r>
+              <a:t>• Fund — search for a specific fund manager (e.g. "Bridgewater", "Vanguard")</a:t>
+            </a:r>
+          </a:p>
+          <a:p>
+            <a:pPr lvl="1">
+              <a:spcAft>
+                <a:spcPts val="300"/>
+              </a:spcAft>
+              <a:defRPr sz="1300">
+                <a:solidFill>
+                  <a:srgbClr val="F8FAFC"/>
+                </a:solidFill>
+              </a:defRPr>
+            </a:pPr>
+            <a:r>
+              <a:t>• Min Value ($) — filter positions by minimum value ($1M, $10M, $100M, $1B)</a:t>
+            </a:r>
+          </a:p>
+          <a:p>
+            <a:pPr lvl="1">
+              <a:spcAft>
+                <a:spcPts val="300"/>
+              </a:spcAft>
+              <a:defRPr sz="1300">
+                <a:solidFill>
+                  <a:srgbClr val="F8FAFC"/>
+                </a:solidFill>
+              </a:defRPr>
+            </a:pPr>
+            <a:r>
+              <a:t>• Limit — number of positions to display (200, 500, 1000)</a:t>
+            </a:r>
+          </a:p>
+          <a:p>
+            <a:pPr>
+              <a:spcAft>
+                <a:spcPts val="300"/>
+              </a:spcAft>
+              <a:defRPr sz="1300">
+                <a:solidFill>
+                  <a:srgbClr val="F8FAFC"/>
+                </a:solidFill>
+              </a:defRPr>
+            </a:pPr>
+            <a:r>
+              <a:t>Click Apply to refresh the treemap.</a:t>
+            </a:r>
+          </a:p>
+          <a:p>
+            <a:pPr>
               <a:spcBef>
-                <a:spcPts val="1200"/>
+                <a:spcPts val="1000"/>
               </a:spcBef>
               <a:spcAft>
                 <a:spcPts val="400"/>
               </a:spcAft>
-              <a:defRPr sz="1800" b="1">
+              <a:defRPr sz="1600" b="1">
                 <a:solidFill>
                   <a:srgbClr val="F59E0B"/>
                 </a:solidFill>
               </a:defRPr>
             </a:pPr>
             <a:r>
-              <a:t>Excel (XLSX)</a:t>
-            </a:r>
-          </a:p>
-          <a:p>
-            <a:pPr>
+              <a:t>Chat commands</a:t>
+            </a:r>
+          </a:p>
+          <a:p>
+            <a:pPr>
+              <a:spcAft>
+                <a:spcPts val="300"/>
+              </a:spcAft>
+              <a:defRPr sz="1300">
+                <a:solidFill>
+                  <a:srgbClr val="F8FAFC"/>
+                </a:solidFill>
+              </a:defRPr>
+            </a:pPr>
+            <a:r>
+              <a:t>Click these in the left nav or type the prefix in chat:</a:t>
+            </a:r>
+          </a:p>
+          <a:p>
+            <a:pPr lvl="1">
+              <a:spcAft>
+                <a:spcPts val="300"/>
+              </a:spcAft>
+              <a:defRPr sz="1300">
+                <a:solidFill>
+                  <a:srgbClr val="F8FAFC"/>
+                </a:solidFill>
+              </a:defRPr>
+            </a:pPr>
+            <a:r>
+              <a:t>• Top Holdings — hedgefunds: top funds by AUM</a:t>
+            </a:r>
+          </a:p>
+          <a:p>
+            <a:pPr lvl="1">
+              <a:spcAft>
+                <a:spcPts val="300"/>
+              </a:spcAft>
+              <a:defRPr sz="1300">
+                <a:solidFill>
+                  <a:srgbClr val="F8FAFC"/>
+                </a:solidFill>
+              </a:defRPr>
+            </a:pPr>
+            <a:r>
+              <a:t>• Popular Securities — hedgefunds: most popular securities across all funds</a:t>
+            </a:r>
+          </a:p>
+          <a:p>
+            <a:pPr lvl="1">
+              <a:spcAft>
+                <a:spcPts val="300"/>
+              </a:spcAft>
+              <a:defRPr sz="1300">
+                <a:solidFill>
+                  <a:srgbClr val="F8FAFC"/>
+                </a:solidFill>
+              </a:defRPr>
+            </a:pPr>
+            <a:r>
+              <a:t>• Activist Filings — hedgefunds: recent activist filings</a:t>
+            </a:r>
+          </a:p>
+          <a:p>
+            <a:pPr lvl="1">
+              <a:spcAft>
+                <a:spcPts val="300"/>
+              </a:spcAft>
+              <a:defRPr sz="1300">
+                <a:solidFill>
+                  <a:srgbClr val="F8FAFC"/>
+                </a:solidFill>
+              </a:defRPr>
+            </a:pPr>
+            <a:r>
+              <a:t>• Fund Search — hedgefunds: search for Bridgewater</a:t>
+            </a:r>
+          </a:p>
+          <a:p>
+            <a:pPr>
+              <a:spcBef>
+                <a:spcPts val="1000"/>
+              </a:spcBef>
               <a:spcAft>
                 <a:spcPts val="400"/>
               </a:spcAft>
-              <a:defRPr sz="1400">
-                <a:solidFill>
-                  <a:srgbClr val="F8FAFC"/>
-                </a:solidFill>
-              </a:defRPr>
-            </a:pPr>
-            <a:r>
-              <a:t>When an agent produces a table, click the Download XLSX button to get a formatted Excel file with styled headers.</a:t>
-            </a:r>
-          </a:p>
-          <a:p>
-            <a:pPr>
-              <a:spcBef>
-                <a:spcPts val="1200"/>
-              </a:spcBef>
-              <a:spcAft>
-                <a:spcPts val="400"/>
-              </a:spcAft>
-              <a:defRPr sz="1800" b="1">
+              <a:defRPr sz="1600" b="1">
                 <a:solidFill>
                   <a:srgbClr val="F59E0B"/>
                 </a:solidFill>
               </a:defRPr>
             </a:pPr>
             <a:r>
-              <a:t>Word (DOCX)</a:t>
-            </a:r>
-          </a:p>
-          <a:p>
-            <a:pPr>
-              <a:spcAft>
-                <a:spcPts val="400"/>
-              </a:spcAft>
-              <a:defRPr sz="1400">
-                <a:solidFill>
-                  <a:srgbClr val="F8FAFC"/>
-                </a:solidFill>
-              </a:defRPr>
-            </a:pPr>
-            <a:r>
-              <a:t>IC memos, teasers, and other markdown content can be exported as Word documents via the Download DOCX button.</a:t>
-            </a:r>
-          </a:p>
-          <a:p>
-            <a:pPr>
-              <a:spcBef>
-                <a:spcPts val="1200"/>
-              </a:spcBef>
-              <a:spcAft>
-                <a:spcPts val="400"/>
-              </a:spcAft>
-              <a:defRPr sz="1800" b="1">
-                <a:solidFill>
-                  <a:srgbClr val="F59E0B"/>
-                </a:solidFill>
-              </a:defRPr>
-            </a:pPr>
-            <a:r>
-              <a:t>PDF</a:t>
-            </a:r>
-          </a:p>
-          <a:p>
-            <a:pPr>
-              <a:spcAft>
-                <a:spcPts val="400"/>
-              </a:spcAft>
-              <a:defRPr sz="1400">
-                <a:solidFill>
-                  <a:srgbClr val="F8FAFC"/>
-                </a:solidFill>
-              </a:defRPr>
-            </a:pPr>
-            <a:r>
-              <a:t>IC memos produce a PDF preview in the right pane. Company cards can also be downloaded as PDF files with LiquidRound branding.</a:t>
+              <a:t>Data source</a:t>
+            </a:r>
+          </a:p>
+          <a:p>
+            <a:pPr>
+              <a:spcAft>
+                <a:spcPts val="300"/>
+              </a:spcAft>
+              <a:defRPr sz="1300">
+                <a:solidFill>
+                  <a:srgbClr val="F8FAFC"/>
+                </a:solidFill>
+              </a:defRPr>
+            </a:pPr>
+            <a:r>
+              <a:t>All hedge fund data comes from SEC Form 13F filings — mandatory quarterly</a:t>
+            </a:r>
+          </a:p>
+          <a:p>
+            <a:pPr>
+              <a:spcAft>
+                <a:spcPts val="300"/>
+              </a:spcAft>
+              <a:defRPr sz="1300">
+                <a:solidFill>
+                  <a:srgbClr val="F8FAFC"/>
+                </a:solidFill>
+              </a:defRPr>
+            </a:pPr>
+            <a:r>
+              <a:t>disclosures by institutional investment managers with over $100M in qualifying</a:t>
+            </a:r>
+          </a:p>
+          <a:p>
+            <a:pPr>
+              <a:spcAft>
+                <a:spcPts val="300"/>
+              </a:spcAft>
+              <a:defRPr sz="1300">
+                <a:solidFill>
+                  <a:srgbClr val="F8FAFC"/>
+                </a:solidFill>
+              </a:defRPr>
+            </a:pPr>
+            <a:r>
+              <a:t>assets. Approximately 10,000+ fund managers and 7 million+ holdings in</a:t>
+            </a:r>
+          </a:p>
+          <a:p>
+            <a:pPr>
+              <a:spcAft>
+                <a:spcPts val="300"/>
+              </a:spcAft>
+              <a:defRPr sz="1300">
+                <a:solidFill>
+                  <a:srgbClr val="F8FAFC"/>
+                </a:solidFill>
+              </a:defRPr>
+            </a:pPr>
+            <a:r>
+              <a:t>the database.</a:t>
             </a:r>
           </a:p>
         </p:txBody>
